--- a/1.training_model/supplementary/Device Identifier 20260520.pptx
+++ b/1.training_model/supplementary/Device Identifier 20260520.pptx
@@ -10831,7 +10831,7 @@
         </p:nvSpPr>
         <p:spPr>
           <a:xfrm>
-            <a:off x="4504451" y="960120"/>
+            <a:off x="6845315" y="768096"/>
             <a:ext cx="3036793" cy="369332"/>
           </a:xfrm>
           <a:prstGeom prst="rect">

--- a/1.training_model/supplementary/Device Identifier 20260520.pptx
+++ b/1.training_model/supplementary/Device Identifier 20260520.pptx
@@ -5,15 +5,18 @@
     <p:sldMasterId id="2147483696" r:id="rId1"/>
   </p:sldMasterIdLst>
   <p:notesMasterIdLst>
-    <p:notesMasterId r:id="rId8"/>
+    <p:notesMasterId r:id="rId11"/>
   </p:notesMasterIdLst>
   <p:sldIdLst>
     <p:sldId id="256" r:id="rId2"/>
     <p:sldId id="325" r:id="rId3"/>
     <p:sldId id="292" r:id="rId4"/>
-    <p:sldId id="323" r:id="rId5"/>
-    <p:sldId id="327" r:id="rId6"/>
-    <p:sldId id="326" r:id="rId7"/>
+    <p:sldId id="328" r:id="rId5"/>
+    <p:sldId id="329" r:id="rId6"/>
+    <p:sldId id="330" r:id="rId7"/>
+    <p:sldId id="323" r:id="rId8"/>
+    <p:sldId id="327" r:id="rId9"/>
+    <p:sldId id="326" r:id="rId10"/>
   </p:sldIdLst>
   <p:sldSz cx="12192000" cy="6858000"/>
   <p:notesSz cx="6858000" cy="9144000"/>
@@ -202,7 +205,7 @@
           <a:p>
             <a:fld id="{23D8B80A-F233-4240-BDAF-6537AE249829}" type="datetimeFigureOut">
               <a:rPr lang="en-MY" smtClean="0"/>
-              <a:t>9/6/2026</a:t>
+              <a:t>15/6/2026</a:t>
             </a:fld>
             <a:endParaRPr lang="en-MY"/>
           </a:p>
@@ -646,6 +649,330 @@
         <p:cNvPr id="1" name="">
           <a:extLst>
             <a:ext uri="{FF2B5EF4-FFF2-40B4-BE49-F238E27FC236}">
+              <a16:creationId xmlns:a16="http://schemas.microsoft.com/office/drawing/2014/main" id="{B34454B8-8657-C20F-58A7-8F453E4CAC08}"/>
+            </a:ext>
+          </a:extLst>
+        </p:cNvPr>
+        <p:cNvGrpSpPr/>
+        <p:nvPr/>
+      </p:nvGrpSpPr>
+      <p:grpSpPr>
+        <a:xfrm>
+          <a:off x="0" y="0"/>
+          <a:ext cx="0" cy="0"/>
+          <a:chOff x="0" y="0"/>
+          <a:chExt cx="0" cy="0"/>
+        </a:xfrm>
+      </p:grpSpPr>
+      <p:sp>
+        <p:nvSpPr>
+          <p:cNvPr id="2" name="Slide Image Placeholder 1">
+            <a:extLst>
+              <a:ext uri="{FF2B5EF4-FFF2-40B4-BE49-F238E27FC236}">
+                <a16:creationId xmlns:a16="http://schemas.microsoft.com/office/drawing/2014/main" id="{C43914B0-D763-1ACA-2A67-D6D7E2421BDF}"/>
+              </a:ext>
+            </a:extLst>
+          </p:cNvPr>
+          <p:cNvSpPr>
+            <a:spLocks noGrp="1" noRot="1" noChangeAspect="1"/>
+          </p:cNvSpPr>
+          <p:nvPr>
+            <p:ph type="sldImg"/>
+          </p:nvPr>
+        </p:nvSpPr>
+        <p:spPr/>
+      </p:sp>
+      <p:sp>
+        <p:nvSpPr>
+          <p:cNvPr id="3" name="Notes Placeholder 2">
+            <a:extLst>
+              <a:ext uri="{FF2B5EF4-FFF2-40B4-BE49-F238E27FC236}">
+                <a16:creationId xmlns:a16="http://schemas.microsoft.com/office/drawing/2014/main" id="{152E6674-47D8-50B1-8B70-FE3AFFD5582D}"/>
+              </a:ext>
+            </a:extLst>
+          </p:cNvPr>
+          <p:cNvSpPr>
+            <a:spLocks noGrp="1"/>
+          </p:cNvSpPr>
+          <p:nvPr>
+            <p:ph type="body" idx="1"/>
+          </p:nvPr>
+        </p:nvSpPr>
+        <p:spPr/>
+        <p:txBody>
+          <a:bodyPr/>
+          <a:lstStyle/>
+          <a:p>
+            <a:endParaRPr lang="en-MY" dirty="0"/>
+          </a:p>
+        </p:txBody>
+      </p:sp>
+      <p:sp>
+        <p:nvSpPr>
+          <p:cNvPr id="4" name="Slide Number Placeholder 3">
+            <a:extLst>
+              <a:ext uri="{FF2B5EF4-FFF2-40B4-BE49-F238E27FC236}">
+                <a16:creationId xmlns:a16="http://schemas.microsoft.com/office/drawing/2014/main" id="{8B510E1C-A6AC-0A8B-FF26-0580D6C5E16A}"/>
+              </a:ext>
+            </a:extLst>
+          </p:cNvPr>
+          <p:cNvSpPr>
+            <a:spLocks noGrp="1"/>
+          </p:cNvSpPr>
+          <p:nvPr>
+            <p:ph type="sldNum" sz="quarter" idx="5"/>
+          </p:nvPr>
+        </p:nvSpPr>
+        <p:spPr/>
+        <p:txBody>
+          <a:bodyPr/>
+          <a:lstStyle/>
+          <a:p>
+            <a:fld id="{D16833E0-5E66-4D1D-89F5-BD860FDD8F71}" type="slidenum">
+              <a:rPr lang="en-MY" smtClean="0"/>
+              <a:t>4</a:t>
+            </a:fld>
+            <a:endParaRPr lang="en-MY"/>
+          </a:p>
+        </p:txBody>
+      </p:sp>
+    </p:spTree>
+    <p:extLst>
+      <p:ext uri="{BB962C8B-B14F-4D97-AF65-F5344CB8AC3E}">
+        <p14:creationId xmlns:p14="http://schemas.microsoft.com/office/powerpoint/2010/main" val="2604040009"/>
+      </p:ext>
+    </p:extLst>
+  </p:cSld>
+  <p:clrMapOvr>
+    <a:masterClrMapping/>
+  </p:clrMapOvr>
+</p:notes>
+</file>
+
+<file path=ppt/notesSlides/notesSlide4.xml><?xml version="1.0" encoding="utf-8"?>
+<p:notes xmlns:a="http://schemas.openxmlformats.org/drawingml/2006/main" xmlns:r="http://schemas.openxmlformats.org/officeDocument/2006/relationships" xmlns:p="http://schemas.openxmlformats.org/presentationml/2006/main">
+  <p:cSld>
+    <p:spTree>
+      <p:nvGrpSpPr>
+        <p:cNvPr id="1" name="">
+          <a:extLst>
+            <a:ext uri="{FF2B5EF4-FFF2-40B4-BE49-F238E27FC236}">
+              <a16:creationId xmlns:a16="http://schemas.microsoft.com/office/drawing/2014/main" id="{74AF1655-1C27-90A4-71E8-FBD974FD2283}"/>
+            </a:ext>
+          </a:extLst>
+        </p:cNvPr>
+        <p:cNvGrpSpPr/>
+        <p:nvPr/>
+      </p:nvGrpSpPr>
+      <p:grpSpPr>
+        <a:xfrm>
+          <a:off x="0" y="0"/>
+          <a:ext cx="0" cy="0"/>
+          <a:chOff x="0" y="0"/>
+          <a:chExt cx="0" cy="0"/>
+        </a:xfrm>
+      </p:grpSpPr>
+      <p:sp>
+        <p:nvSpPr>
+          <p:cNvPr id="2" name="Slide Image Placeholder 1">
+            <a:extLst>
+              <a:ext uri="{FF2B5EF4-FFF2-40B4-BE49-F238E27FC236}">
+                <a16:creationId xmlns:a16="http://schemas.microsoft.com/office/drawing/2014/main" id="{61E2A174-83FD-E504-803C-F9C8933ADE4A}"/>
+              </a:ext>
+            </a:extLst>
+          </p:cNvPr>
+          <p:cNvSpPr>
+            <a:spLocks noGrp="1" noRot="1" noChangeAspect="1"/>
+          </p:cNvSpPr>
+          <p:nvPr>
+            <p:ph type="sldImg"/>
+          </p:nvPr>
+        </p:nvSpPr>
+        <p:spPr/>
+      </p:sp>
+      <p:sp>
+        <p:nvSpPr>
+          <p:cNvPr id="3" name="Notes Placeholder 2">
+            <a:extLst>
+              <a:ext uri="{FF2B5EF4-FFF2-40B4-BE49-F238E27FC236}">
+                <a16:creationId xmlns:a16="http://schemas.microsoft.com/office/drawing/2014/main" id="{0101B9EE-8786-6B4F-F0DD-1A24E61F0A25}"/>
+              </a:ext>
+            </a:extLst>
+          </p:cNvPr>
+          <p:cNvSpPr>
+            <a:spLocks noGrp="1"/>
+          </p:cNvSpPr>
+          <p:nvPr>
+            <p:ph type="body" idx="1"/>
+          </p:nvPr>
+        </p:nvSpPr>
+        <p:spPr/>
+        <p:txBody>
+          <a:bodyPr/>
+          <a:lstStyle/>
+          <a:p>
+            <a:endParaRPr lang="en-MY" dirty="0"/>
+          </a:p>
+        </p:txBody>
+      </p:sp>
+      <p:sp>
+        <p:nvSpPr>
+          <p:cNvPr id="4" name="Slide Number Placeholder 3">
+            <a:extLst>
+              <a:ext uri="{FF2B5EF4-FFF2-40B4-BE49-F238E27FC236}">
+                <a16:creationId xmlns:a16="http://schemas.microsoft.com/office/drawing/2014/main" id="{8C0C6B27-D333-CB81-027E-D188F9EAB2D7}"/>
+              </a:ext>
+            </a:extLst>
+          </p:cNvPr>
+          <p:cNvSpPr>
+            <a:spLocks noGrp="1"/>
+          </p:cNvSpPr>
+          <p:nvPr>
+            <p:ph type="sldNum" sz="quarter" idx="5"/>
+          </p:nvPr>
+        </p:nvSpPr>
+        <p:spPr/>
+        <p:txBody>
+          <a:bodyPr/>
+          <a:lstStyle/>
+          <a:p>
+            <a:fld id="{D16833E0-5E66-4D1D-89F5-BD860FDD8F71}" type="slidenum">
+              <a:rPr lang="en-MY" smtClean="0"/>
+              <a:t>5</a:t>
+            </a:fld>
+            <a:endParaRPr lang="en-MY"/>
+          </a:p>
+        </p:txBody>
+      </p:sp>
+    </p:spTree>
+    <p:extLst>
+      <p:ext uri="{BB962C8B-B14F-4D97-AF65-F5344CB8AC3E}">
+        <p14:creationId xmlns:p14="http://schemas.microsoft.com/office/powerpoint/2010/main" val="2529154773"/>
+      </p:ext>
+    </p:extLst>
+  </p:cSld>
+  <p:clrMapOvr>
+    <a:masterClrMapping/>
+  </p:clrMapOvr>
+</p:notes>
+</file>
+
+<file path=ppt/notesSlides/notesSlide5.xml><?xml version="1.0" encoding="utf-8"?>
+<p:notes xmlns:a="http://schemas.openxmlformats.org/drawingml/2006/main" xmlns:r="http://schemas.openxmlformats.org/officeDocument/2006/relationships" xmlns:p="http://schemas.openxmlformats.org/presentationml/2006/main">
+  <p:cSld>
+    <p:spTree>
+      <p:nvGrpSpPr>
+        <p:cNvPr id="1" name="">
+          <a:extLst>
+            <a:ext uri="{FF2B5EF4-FFF2-40B4-BE49-F238E27FC236}">
+              <a16:creationId xmlns:a16="http://schemas.microsoft.com/office/drawing/2014/main" id="{F25D6A45-5345-C119-2077-2724690AF3EE}"/>
+            </a:ext>
+          </a:extLst>
+        </p:cNvPr>
+        <p:cNvGrpSpPr/>
+        <p:nvPr/>
+      </p:nvGrpSpPr>
+      <p:grpSpPr>
+        <a:xfrm>
+          <a:off x="0" y="0"/>
+          <a:ext cx="0" cy="0"/>
+          <a:chOff x="0" y="0"/>
+          <a:chExt cx="0" cy="0"/>
+        </a:xfrm>
+      </p:grpSpPr>
+      <p:sp>
+        <p:nvSpPr>
+          <p:cNvPr id="2" name="Slide Image Placeholder 1">
+            <a:extLst>
+              <a:ext uri="{FF2B5EF4-FFF2-40B4-BE49-F238E27FC236}">
+                <a16:creationId xmlns:a16="http://schemas.microsoft.com/office/drawing/2014/main" id="{24C56EFF-512F-DCC6-60FB-9B500E0FED0F}"/>
+              </a:ext>
+            </a:extLst>
+          </p:cNvPr>
+          <p:cNvSpPr>
+            <a:spLocks noGrp="1" noRot="1" noChangeAspect="1"/>
+          </p:cNvSpPr>
+          <p:nvPr>
+            <p:ph type="sldImg"/>
+          </p:nvPr>
+        </p:nvSpPr>
+        <p:spPr/>
+      </p:sp>
+      <p:sp>
+        <p:nvSpPr>
+          <p:cNvPr id="3" name="Notes Placeholder 2">
+            <a:extLst>
+              <a:ext uri="{FF2B5EF4-FFF2-40B4-BE49-F238E27FC236}">
+                <a16:creationId xmlns:a16="http://schemas.microsoft.com/office/drawing/2014/main" id="{F27DE9F1-36AD-FE8F-9117-24D636617528}"/>
+              </a:ext>
+            </a:extLst>
+          </p:cNvPr>
+          <p:cNvSpPr>
+            <a:spLocks noGrp="1"/>
+          </p:cNvSpPr>
+          <p:nvPr>
+            <p:ph type="body" idx="1"/>
+          </p:nvPr>
+        </p:nvSpPr>
+        <p:spPr/>
+        <p:txBody>
+          <a:bodyPr/>
+          <a:lstStyle/>
+          <a:p>
+            <a:endParaRPr lang="en-MY" dirty="0"/>
+          </a:p>
+        </p:txBody>
+      </p:sp>
+      <p:sp>
+        <p:nvSpPr>
+          <p:cNvPr id="4" name="Slide Number Placeholder 3">
+            <a:extLst>
+              <a:ext uri="{FF2B5EF4-FFF2-40B4-BE49-F238E27FC236}">
+                <a16:creationId xmlns:a16="http://schemas.microsoft.com/office/drawing/2014/main" id="{94F4BF3F-9B0A-ED03-3308-B1B55354E55E}"/>
+              </a:ext>
+            </a:extLst>
+          </p:cNvPr>
+          <p:cNvSpPr>
+            <a:spLocks noGrp="1"/>
+          </p:cNvSpPr>
+          <p:nvPr>
+            <p:ph type="sldNum" sz="quarter" idx="5"/>
+          </p:nvPr>
+        </p:nvSpPr>
+        <p:spPr/>
+        <p:txBody>
+          <a:bodyPr/>
+          <a:lstStyle/>
+          <a:p>
+            <a:fld id="{D16833E0-5E66-4D1D-89F5-BD860FDD8F71}" type="slidenum">
+              <a:rPr lang="en-MY" smtClean="0"/>
+              <a:t>6</a:t>
+            </a:fld>
+            <a:endParaRPr lang="en-MY"/>
+          </a:p>
+        </p:txBody>
+      </p:sp>
+    </p:spTree>
+    <p:extLst>
+      <p:ext uri="{BB962C8B-B14F-4D97-AF65-F5344CB8AC3E}">
+        <p14:creationId xmlns:p14="http://schemas.microsoft.com/office/powerpoint/2010/main" val="3264368479"/>
+      </p:ext>
+    </p:extLst>
+  </p:cSld>
+  <p:clrMapOvr>
+    <a:masterClrMapping/>
+  </p:clrMapOvr>
+</p:notes>
+</file>
+
+<file path=ppt/notesSlides/notesSlide6.xml><?xml version="1.0" encoding="utf-8"?>
+<p:notes xmlns:a="http://schemas.openxmlformats.org/drawingml/2006/main" xmlns:r="http://schemas.openxmlformats.org/officeDocument/2006/relationships" xmlns:p="http://schemas.openxmlformats.org/presentationml/2006/main">
+  <p:cSld>
+    <p:spTree>
+      <p:nvGrpSpPr>
+        <p:cNvPr id="1" name="">
+          <a:extLst>
+            <a:ext uri="{FF2B5EF4-FFF2-40B4-BE49-F238E27FC236}">
               <a16:creationId xmlns:a16="http://schemas.microsoft.com/office/drawing/2014/main" id="{A183267B-B82B-1EDC-363F-2C9961D70AB9}"/>
             </a:ext>
           </a:extLst>
@@ -727,7 +1054,7 @@
           <a:p>
             <a:fld id="{D16833E0-5E66-4D1D-89F5-BD860FDD8F71}" type="slidenum">
               <a:rPr lang="en-MY" smtClean="0"/>
-              <a:t>4</a:t>
+              <a:t>7</a:t>
             </a:fld>
             <a:endParaRPr lang="en-MY"/>
           </a:p>
@@ -746,7 +1073,7 @@
 </p:notes>
 </file>
 
-<file path=ppt/notesSlides/notesSlide4.xml><?xml version="1.0" encoding="utf-8"?>
+<file path=ppt/notesSlides/notesSlide7.xml><?xml version="1.0" encoding="utf-8"?>
 <p:notes xmlns:a="http://schemas.openxmlformats.org/drawingml/2006/main" xmlns:r="http://schemas.openxmlformats.org/officeDocument/2006/relationships" xmlns:p="http://schemas.openxmlformats.org/presentationml/2006/main">
   <p:cSld>
     <p:spTree>
@@ -835,7 +1162,7 @@
           <a:p>
             <a:fld id="{D16833E0-5E66-4D1D-89F5-BD860FDD8F71}" type="slidenum">
               <a:rPr lang="en-MY" smtClean="0"/>
-              <a:t>5</a:t>
+              <a:t>8</a:t>
             </a:fld>
             <a:endParaRPr lang="en-MY"/>
           </a:p>
@@ -1025,7 +1352,7 @@
           <a:p>
             <a:fld id="{1CD01395-AC05-405C-BAB9-E5D2B9FDBB40}" type="datetimeFigureOut">
               <a:rPr lang="en-MY" smtClean="0"/>
-              <a:t>9/6/2026</a:t>
+              <a:t>15/6/2026</a:t>
             </a:fld>
             <a:endParaRPr lang="en-MY"/>
           </a:p>
@@ -1340,7 +1667,7 @@
           <a:p>
             <a:fld id="{1CD01395-AC05-405C-BAB9-E5D2B9FDBB40}" type="datetimeFigureOut">
               <a:rPr lang="en-MY" smtClean="0"/>
-              <a:t>9/6/2026</a:t>
+              <a:t>15/6/2026</a:t>
             </a:fld>
             <a:endParaRPr lang="en-MY"/>
           </a:p>
@@ -1562,7 +1889,7 @@
           <a:p>
             <a:fld id="{1CD01395-AC05-405C-BAB9-E5D2B9FDBB40}" type="datetimeFigureOut">
               <a:rPr lang="en-MY" smtClean="0"/>
-              <a:t>9/6/2026</a:t>
+              <a:t>15/6/2026</a:t>
             </a:fld>
             <a:endParaRPr lang="en-MY"/>
           </a:p>
@@ -1853,7 +2180,7 @@
           <a:p>
             <a:fld id="{1CD01395-AC05-405C-BAB9-E5D2B9FDBB40}" type="datetimeFigureOut">
               <a:rPr lang="en-MY" smtClean="0"/>
-              <a:t>9/6/2026</a:t>
+              <a:t>15/6/2026</a:t>
             </a:fld>
             <a:endParaRPr lang="en-MY"/>
           </a:p>
@@ -2307,7 +2634,7 @@
           <a:p>
             <a:fld id="{1CD01395-AC05-405C-BAB9-E5D2B9FDBB40}" type="datetimeFigureOut">
               <a:rPr lang="en-MY" smtClean="0"/>
-              <a:t>9/6/2026</a:t>
+              <a:t>15/6/2026</a:t>
             </a:fld>
             <a:endParaRPr lang="en-MY"/>
           </a:p>
@@ -2883,7 +3210,7 @@
           <a:p>
             <a:fld id="{1CD01395-AC05-405C-BAB9-E5D2B9FDBB40}" type="datetimeFigureOut">
               <a:rPr lang="en-MY" smtClean="0"/>
-              <a:t>9/6/2026</a:t>
+              <a:t>15/6/2026</a:t>
             </a:fld>
             <a:endParaRPr lang="en-MY"/>
           </a:p>
@@ -3744,7 +4071,7 @@
           <a:p>
             <a:fld id="{1CD01395-AC05-405C-BAB9-E5D2B9FDBB40}" type="datetimeFigureOut">
               <a:rPr lang="en-MY" smtClean="0"/>
-              <a:t>9/6/2026</a:t>
+              <a:t>15/6/2026</a:t>
             </a:fld>
             <a:endParaRPr lang="en-MY"/>
           </a:p>
@@ -3949,7 +4276,7 @@
           <a:p>
             <a:fld id="{1CD01395-AC05-405C-BAB9-E5D2B9FDBB40}" type="datetimeFigureOut">
               <a:rPr lang="en-MY" smtClean="0"/>
-              <a:t>9/6/2026</a:t>
+              <a:t>15/6/2026</a:t>
             </a:fld>
             <a:endParaRPr lang="en-MY"/>
           </a:p>
@@ -4163,7 +4490,7 @@
           <a:p>
             <a:fld id="{1CD01395-AC05-405C-BAB9-E5D2B9FDBB40}" type="datetimeFigureOut">
               <a:rPr lang="en-MY" smtClean="0"/>
-              <a:t>9/6/2026</a:t>
+              <a:t>15/6/2026</a:t>
             </a:fld>
             <a:endParaRPr lang="en-MY"/>
           </a:p>
@@ -4368,7 +4695,7 @@
           <a:p>
             <a:fld id="{1CD01395-AC05-405C-BAB9-E5D2B9FDBB40}" type="datetimeFigureOut">
               <a:rPr lang="en-MY" smtClean="0"/>
-              <a:t>9/6/2026</a:t>
+              <a:t>15/6/2026</a:t>
             </a:fld>
             <a:endParaRPr lang="en-MY"/>
           </a:p>
@@ -4648,7 +4975,7 @@
           <a:p>
             <a:fld id="{1CD01395-AC05-405C-BAB9-E5D2B9FDBB40}" type="datetimeFigureOut">
               <a:rPr lang="en-MY" smtClean="0"/>
-              <a:t>9/6/2026</a:t>
+              <a:t>15/6/2026</a:t>
             </a:fld>
             <a:endParaRPr lang="en-MY"/>
           </a:p>
@@ -4915,7 +5242,7 @@
           <a:p>
             <a:fld id="{1CD01395-AC05-405C-BAB9-E5D2B9FDBB40}" type="datetimeFigureOut">
               <a:rPr lang="en-MY" smtClean="0"/>
-              <a:t>9/6/2026</a:t>
+              <a:t>15/6/2026</a:t>
             </a:fld>
             <a:endParaRPr lang="en-MY"/>
           </a:p>
@@ -5330,7 +5657,7 @@
           <a:p>
             <a:fld id="{1CD01395-AC05-405C-BAB9-E5D2B9FDBB40}" type="datetimeFigureOut">
               <a:rPr lang="en-MY" smtClean="0"/>
-              <a:t>9/6/2026</a:t>
+              <a:t>15/6/2026</a:t>
             </a:fld>
             <a:endParaRPr lang="en-MY"/>
           </a:p>
@@ -5478,7 +5805,7 @@
           <a:p>
             <a:fld id="{1CD01395-AC05-405C-BAB9-E5D2B9FDBB40}" type="datetimeFigureOut">
               <a:rPr lang="en-MY" smtClean="0"/>
-              <a:t>9/6/2026</a:t>
+              <a:t>15/6/2026</a:t>
             </a:fld>
             <a:endParaRPr lang="en-MY"/>
           </a:p>
@@ -5603,7 +5930,7 @@
           <a:p>
             <a:fld id="{1CD01395-AC05-405C-BAB9-E5D2B9FDBB40}" type="datetimeFigureOut">
               <a:rPr lang="en-MY" smtClean="0"/>
-              <a:t>9/6/2026</a:t>
+              <a:t>15/6/2026</a:t>
             </a:fld>
             <a:endParaRPr lang="en-MY"/>
           </a:p>
@@ -5882,7 +6209,7 @@
           <a:p>
             <a:fld id="{1CD01395-AC05-405C-BAB9-E5D2B9FDBB40}" type="datetimeFigureOut">
               <a:rPr lang="en-MY" smtClean="0"/>
-              <a:t>9/6/2026</a:t>
+              <a:t>15/6/2026</a:t>
             </a:fld>
             <a:endParaRPr lang="en-MY"/>
           </a:p>
@@ -6197,7 +6524,7 @@
           <a:p>
             <a:fld id="{1CD01395-AC05-405C-BAB9-E5D2B9FDBB40}" type="datetimeFigureOut">
               <a:rPr lang="en-MY" smtClean="0"/>
-              <a:t>9/6/2026</a:t>
+              <a:t>15/6/2026</a:t>
             </a:fld>
             <a:endParaRPr lang="en-MY"/>
           </a:p>
@@ -6450,7 +6777,7 @@
           <a:p>
             <a:fld id="{1CD01395-AC05-405C-BAB9-E5D2B9FDBB40}" type="datetimeFigureOut">
               <a:rPr lang="en-MY" smtClean="0"/>
-              <a:t>9/6/2026</a:t>
+              <a:t>15/6/2026</a:t>
             </a:fld>
             <a:endParaRPr lang="en-MY"/>
           </a:p>
@@ -10657,6 +10984,1926 @@
     <p:bg>
       <p:bgPr>
         <a:solidFill>
+          <a:schemeClr val="bg1"/>
+        </a:solidFill>
+        <a:effectLst/>
+      </p:bgPr>
+    </p:bg>
+    <p:spTree>
+      <p:nvGrpSpPr>
+        <p:cNvPr id="1" name="">
+          <a:extLst>
+            <a:ext uri="{FF2B5EF4-FFF2-40B4-BE49-F238E27FC236}">
+              <a16:creationId xmlns:a16="http://schemas.microsoft.com/office/drawing/2014/main" id="{054F518B-49C6-F9C6-3337-EFCE0F2F2E63}"/>
+            </a:ext>
+          </a:extLst>
+        </p:cNvPr>
+        <p:cNvGrpSpPr/>
+        <p:nvPr/>
+      </p:nvGrpSpPr>
+      <p:grpSpPr>
+        <a:xfrm>
+          <a:off x="0" y="0"/>
+          <a:ext cx="0" cy="0"/>
+          <a:chOff x="0" y="0"/>
+          <a:chExt cx="0" cy="0"/>
+        </a:xfrm>
+      </p:grpSpPr>
+      <p:sp>
+        <p:nvSpPr>
+          <p:cNvPr id="4" name="Rectangle 3">
+            <a:extLst>
+              <a:ext uri="{FF2B5EF4-FFF2-40B4-BE49-F238E27FC236}">
+                <a16:creationId xmlns:a16="http://schemas.microsoft.com/office/drawing/2014/main" id="{80E84C4A-89FD-49A5-43B2-CB78F59C2357}"/>
+              </a:ext>
+            </a:extLst>
+          </p:cNvPr>
+          <p:cNvSpPr/>
+          <p:nvPr/>
+        </p:nvSpPr>
+        <p:spPr>
+          <a:xfrm>
+            <a:off x="6202582" y="271628"/>
+            <a:ext cx="2379453" cy="623006"/>
+          </a:xfrm>
+          <a:prstGeom prst="rect">
+            <a:avLst/>
+          </a:prstGeom>
+          <a:ln>
+            <a:solidFill>
+              <a:schemeClr val="tx1"/>
+            </a:solidFill>
+          </a:ln>
+        </p:spPr>
+        <p:style>
+          <a:lnRef idx="2">
+            <a:schemeClr val="accent6"/>
+          </a:lnRef>
+          <a:fillRef idx="1">
+            <a:schemeClr val="lt1"/>
+          </a:fillRef>
+          <a:effectRef idx="0">
+            <a:schemeClr val="accent6"/>
+          </a:effectRef>
+          <a:fontRef idx="minor">
+            <a:schemeClr val="dk1"/>
+          </a:fontRef>
+        </p:style>
+        <p:txBody>
+          <a:bodyPr rtlCol="0" anchor="ctr"/>
+          <a:lstStyle/>
+          <a:p>
+            <a:pPr algn="ctr">
+              <a:lnSpc>
+                <a:spcPts val="1400"/>
+              </a:lnSpc>
+            </a:pPr>
+            <a:r>
+              <a:rPr lang="en-MY" sz="1200" b="1" dirty="0">
+                <a:latin typeface="Arial" panose="020B0604020202020204" pitchFamily="34" charset="0"/>
+                <a:cs typeface="Arial" panose="020B0604020202020204" pitchFamily="34" charset="0"/>
+              </a:rPr>
+              <a:t>INPUT from DB</a:t>
+            </a:r>
+          </a:p>
+          <a:p>
+            <a:pPr algn="ctr">
+              <a:lnSpc>
+                <a:spcPts val="1400"/>
+              </a:lnSpc>
+            </a:pPr>
+            <a:r>
+              <a:rPr lang="en-MY" sz="1200" dirty="0">
+                <a:latin typeface="Arial" panose="020B0604020202020204" pitchFamily="34" charset="0"/>
+                <a:cs typeface="Arial" panose="020B0604020202020204" pitchFamily="34" charset="0"/>
+              </a:rPr>
+              <a:t>(Customer, Project, Device ID</a:t>
+            </a:r>
+            <a:r>
+              <a:rPr lang="en-MY" sz="1200" b="1" dirty="0">
+                <a:latin typeface="Arial" panose="020B0604020202020204" pitchFamily="34" charset="0"/>
+                <a:cs typeface="Arial" panose="020B0604020202020204" pitchFamily="34" charset="0"/>
+              </a:rPr>
+              <a:t>)</a:t>
+            </a:r>
+          </a:p>
+        </p:txBody>
+      </p:sp>
+      <p:sp>
+        <p:nvSpPr>
+          <p:cNvPr id="11" name="Rectangle 10">
+            <a:extLst>
+              <a:ext uri="{FF2B5EF4-FFF2-40B4-BE49-F238E27FC236}">
+                <a16:creationId xmlns:a16="http://schemas.microsoft.com/office/drawing/2014/main" id="{B20B3B4F-12A2-8155-43AC-83F9C978ECFD}"/>
+              </a:ext>
+            </a:extLst>
+          </p:cNvPr>
+          <p:cNvSpPr/>
+          <p:nvPr/>
+        </p:nvSpPr>
+        <p:spPr>
+          <a:xfrm>
+            <a:off x="5659025" y="4280696"/>
+            <a:ext cx="3475552" cy="597506"/>
+          </a:xfrm>
+          <a:prstGeom prst="rect">
+            <a:avLst/>
+          </a:prstGeom>
+          <a:ln>
+            <a:solidFill>
+              <a:schemeClr val="tx1"/>
+            </a:solidFill>
+          </a:ln>
+        </p:spPr>
+        <p:style>
+          <a:lnRef idx="2">
+            <a:schemeClr val="accent6"/>
+          </a:lnRef>
+          <a:fillRef idx="1">
+            <a:schemeClr val="lt1"/>
+          </a:fillRef>
+          <a:effectRef idx="0">
+            <a:schemeClr val="accent6"/>
+          </a:effectRef>
+          <a:fontRef idx="minor">
+            <a:schemeClr val="dk1"/>
+          </a:fontRef>
+        </p:style>
+        <p:txBody>
+          <a:bodyPr rtlCol="0" anchor="ctr"/>
+          <a:lstStyle/>
+          <a:p>
+            <a:pPr algn="ctr"/>
+            <a:r>
+              <a:rPr lang="en-MY" sz="1200" b="1" dirty="0">
+                <a:latin typeface="Arial" panose="020B0604020202020204" pitchFamily="34" charset="0"/>
+                <a:cs typeface="Arial" panose="020B0604020202020204" pitchFamily="34" charset="0"/>
+              </a:rPr>
+              <a:t>RESULT OUTPUT</a:t>
+            </a:r>
+          </a:p>
+          <a:p>
+            <a:pPr algn="ctr"/>
+            <a:r>
+              <a:rPr lang="en-MY" sz="1200" dirty="0">
+                <a:latin typeface="Arial" panose="020B0604020202020204" pitchFamily="34" charset="0"/>
+                <a:cs typeface="Arial" panose="020B0604020202020204" pitchFamily="34" charset="0"/>
+              </a:rPr>
+              <a:t>(Customer, Project, Device ID,  Section, Cluster)</a:t>
+            </a:r>
+          </a:p>
+        </p:txBody>
+      </p:sp>
+      <p:sp>
+        <p:nvSpPr>
+          <p:cNvPr id="13" name="Rectangle 12">
+            <a:extLst>
+              <a:ext uri="{FF2B5EF4-FFF2-40B4-BE49-F238E27FC236}">
+                <a16:creationId xmlns:a16="http://schemas.microsoft.com/office/drawing/2014/main" id="{C499D534-946B-243C-39ED-8C44A67091A7}"/>
+              </a:ext>
+            </a:extLst>
+          </p:cNvPr>
+          <p:cNvSpPr/>
+          <p:nvPr/>
+        </p:nvSpPr>
+        <p:spPr>
+          <a:xfrm>
+            <a:off x="4365" y="318300"/>
+            <a:ext cx="2312411" cy="368381"/>
+          </a:xfrm>
+          <a:prstGeom prst="rect">
+            <a:avLst/>
+          </a:prstGeom>
+          <a:noFill/>
+          <a:ln>
+            <a:noFill/>
+          </a:ln>
+        </p:spPr>
+        <p:style>
+          <a:lnRef idx="2">
+            <a:schemeClr val="accent6"/>
+          </a:lnRef>
+          <a:fillRef idx="1">
+            <a:schemeClr val="lt1"/>
+          </a:fillRef>
+          <a:effectRef idx="0">
+            <a:schemeClr val="accent6"/>
+          </a:effectRef>
+          <a:fontRef idx="minor">
+            <a:schemeClr val="dk1"/>
+          </a:fontRef>
+        </p:style>
+        <p:txBody>
+          <a:bodyPr rtlCol="0" anchor="ctr"/>
+          <a:lstStyle/>
+          <a:p>
+            <a:pPr algn="ctr"/>
+            <a:r>
+              <a:rPr lang="en-MY" sz="1400" dirty="0"/>
+              <a:t>UPDATE ON (15.06.2026)</a:t>
+            </a:r>
+          </a:p>
+        </p:txBody>
+      </p:sp>
+      <p:sp>
+        <p:nvSpPr>
+          <p:cNvPr id="3" name="Rectangle 2">
+            <a:extLst>
+              <a:ext uri="{FF2B5EF4-FFF2-40B4-BE49-F238E27FC236}">
+                <a16:creationId xmlns:a16="http://schemas.microsoft.com/office/drawing/2014/main" id="{F7607B8A-8D96-E00D-D73A-BF6C50AB13BC}"/>
+              </a:ext>
+            </a:extLst>
+          </p:cNvPr>
+          <p:cNvSpPr/>
+          <p:nvPr/>
+        </p:nvSpPr>
+        <p:spPr>
+          <a:xfrm>
+            <a:off x="1273884" y="3502038"/>
+            <a:ext cx="2240611" cy="478898"/>
+          </a:xfrm>
+          <a:prstGeom prst="rect">
+            <a:avLst/>
+          </a:prstGeom>
+          <a:ln>
+            <a:solidFill>
+              <a:schemeClr val="tx1"/>
+            </a:solidFill>
+          </a:ln>
+        </p:spPr>
+        <p:style>
+          <a:lnRef idx="2">
+            <a:schemeClr val="accent6"/>
+          </a:lnRef>
+          <a:fillRef idx="1">
+            <a:schemeClr val="lt1"/>
+          </a:fillRef>
+          <a:effectRef idx="0">
+            <a:schemeClr val="accent6"/>
+          </a:effectRef>
+          <a:fontRef idx="minor">
+            <a:schemeClr val="dk1"/>
+          </a:fontRef>
+        </p:style>
+        <p:txBody>
+          <a:bodyPr rtlCol="0" anchor="ctr"/>
+          <a:lstStyle/>
+          <a:p>
+            <a:pPr algn="ctr"/>
+            <a:r>
+              <a:rPr lang="en-MY" sz="1200" b="1" dirty="0">
+                <a:solidFill>
+                  <a:srgbClr val="FF0000"/>
+                </a:solidFill>
+                <a:latin typeface="Arial" panose="020B0604020202020204" pitchFamily="34" charset="0"/>
+                <a:cs typeface="Arial" panose="020B0604020202020204" pitchFamily="34" charset="0"/>
+              </a:rPr>
+              <a:t>UNKNOWN</a:t>
+            </a:r>
+          </a:p>
+          <a:p>
+            <a:pPr algn="ctr"/>
+            <a:r>
+              <a:rPr lang="en-MY" sz="1200" dirty="0">
+                <a:latin typeface="Arial" panose="020B0604020202020204" pitchFamily="34" charset="0"/>
+                <a:cs typeface="Arial" panose="020B0604020202020204" pitchFamily="34" charset="0"/>
+              </a:rPr>
+              <a:t>= Assign by User</a:t>
+            </a:r>
+          </a:p>
+        </p:txBody>
+      </p:sp>
+      <p:sp>
+        <p:nvSpPr>
+          <p:cNvPr id="15" name="Rectangle 14">
+            <a:extLst>
+              <a:ext uri="{FF2B5EF4-FFF2-40B4-BE49-F238E27FC236}">
+                <a16:creationId xmlns:a16="http://schemas.microsoft.com/office/drawing/2014/main" id="{9F3F11E6-D2CB-AC79-027E-DF0DE17CEA8C}"/>
+              </a:ext>
+            </a:extLst>
+          </p:cNvPr>
+          <p:cNvSpPr/>
+          <p:nvPr/>
+        </p:nvSpPr>
+        <p:spPr>
+          <a:xfrm>
+            <a:off x="1273882" y="2578246"/>
+            <a:ext cx="2240613" cy="338527"/>
+          </a:xfrm>
+          <a:prstGeom prst="rect">
+            <a:avLst/>
+          </a:prstGeom>
+          <a:ln>
+            <a:solidFill>
+              <a:schemeClr val="tx1"/>
+            </a:solidFill>
+          </a:ln>
+        </p:spPr>
+        <p:style>
+          <a:lnRef idx="2">
+            <a:schemeClr val="accent6"/>
+          </a:lnRef>
+          <a:fillRef idx="1">
+            <a:schemeClr val="lt1"/>
+          </a:fillRef>
+          <a:effectRef idx="0">
+            <a:schemeClr val="accent6"/>
+          </a:effectRef>
+          <a:fontRef idx="minor">
+            <a:schemeClr val="dk1"/>
+          </a:fontRef>
+        </p:style>
+        <p:txBody>
+          <a:bodyPr rtlCol="0" anchor="ctr"/>
+          <a:lstStyle/>
+          <a:p>
+            <a:pPr algn="ctr"/>
+            <a:r>
+              <a:rPr lang="en-MY" sz="1200" dirty="0">
+                <a:latin typeface="Arial" panose="020B0604020202020204" pitchFamily="34" charset="0"/>
+                <a:cs typeface="Arial" panose="020B0604020202020204" pitchFamily="34" charset="0"/>
+              </a:rPr>
+              <a:t>NEW LIST OF EQUIPMENT</a:t>
+            </a:r>
+          </a:p>
+        </p:txBody>
+      </p:sp>
+      <p:sp>
+        <p:nvSpPr>
+          <p:cNvPr id="33" name="Rectangle 32">
+            <a:extLst>
+              <a:ext uri="{FF2B5EF4-FFF2-40B4-BE49-F238E27FC236}">
+                <a16:creationId xmlns:a16="http://schemas.microsoft.com/office/drawing/2014/main" id="{3201FE1B-7455-9494-22BF-97A996CF2CDE}"/>
+              </a:ext>
+            </a:extLst>
+          </p:cNvPr>
+          <p:cNvSpPr/>
+          <p:nvPr/>
+        </p:nvSpPr>
+        <p:spPr>
+          <a:xfrm>
+            <a:off x="5860891" y="1945583"/>
+            <a:ext cx="3076565" cy="1795904"/>
+          </a:xfrm>
+          <a:prstGeom prst="rect">
+            <a:avLst/>
+          </a:prstGeom>
+          <a:solidFill>
+            <a:schemeClr val="bg1"/>
+          </a:solidFill>
+          <a:ln w="12700">
+            <a:solidFill>
+              <a:schemeClr val="tx1"/>
+            </a:solidFill>
+          </a:ln>
+        </p:spPr>
+        <p:style>
+          <a:lnRef idx="2">
+            <a:schemeClr val="accent6"/>
+          </a:lnRef>
+          <a:fillRef idx="1">
+            <a:schemeClr val="lt1"/>
+          </a:fillRef>
+          <a:effectRef idx="0">
+            <a:schemeClr val="accent6"/>
+          </a:effectRef>
+          <a:fontRef idx="minor">
+            <a:schemeClr val="dk1"/>
+          </a:fontRef>
+        </p:style>
+        <p:txBody>
+          <a:bodyPr rtlCol="0" anchor="ctr"/>
+          <a:lstStyle/>
+          <a:p>
+            <a:pPr algn="ctr"/>
+            <a:endParaRPr lang="en-MY" sz="1600" b="1" dirty="0"/>
+          </a:p>
+        </p:txBody>
+      </p:sp>
+      <p:cxnSp>
+        <p:nvCxnSpPr>
+          <p:cNvPr id="86" name="Straight Arrow Connector 85">
+            <a:extLst>
+              <a:ext uri="{FF2B5EF4-FFF2-40B4-BE49-F238E27FC236}">
+                <a16:creationId xmlns:a16="http://schemas.microsoft.com/office/drawing/2014/main" id="{E1FD67D6-78E0-EBC7-0ED3-21B26BE3D21C}"/>
+              </a:ext>
+            </a:extLst>
+          </p:cNvPr>
+          <p:cNvCxnSpPr>
+            <a:cxnSpLocks/>
+            <a:stCxn id="15" idx="3"/>
+            <a:endCxn id="48" idx="1"/>
+          </p:cNvCxnSpPr>
+          <p:nvPr/>
+        </p:nvCxnSpPr>
+        <p:spPr>
+          <a:xfrm flipV="1">
+            <a:off x="3514495" y="1883200"/>
+            <a:ext cx="2352143" cy="864310"/>
+          </a:xfrm>
+          <a:prstGeom prst="straightConnector1">
+            <a:avLst/>
+          </a:prstGeom>
+          <a:ln w="57150">
+            <a:solidFill>
+              <a:schemeClr val="accent1">
+                <a:lumMod val="75000"/>
+              </a:schemeClr>
+            </a:solidFill>
+            <a:tailEnd type="triangle"/>
+          </a:ln>
+        </p:spPr>
+        <p:style>
+          <a:lnRef idx="1">
+            <a:schemeClr val="accent1"/>
+          </a:lnRef>
+          <a:fillRef idx="0">
+            <a:schemeClr val="accent1"/>
+          </a:fillRef>
+          <a:effectRef idx="0">
+            <a:schemeClr val="accent1"/>
+          </a:effectRef>
+          <a:fontRef idx="minor">
+            <a:schemeClr val="tx1"/>
+          </a:fontRef>
+        </p:style>
+      </p:cxnSp>
+      <p:cxnSp>
+        <p:nvCxnSpPr>
+          <p:cNvPr id="20" name="Straight Arrow Connector 19">
+            <a:extLst>
+              <a:ext uri="{FF2B5EF4-FFF2-40B4-BE49-F238E27FC236}">
+                <a16:creationId xmlns:a16="http://schemas.microsoft.com/office/drawing/2014/main" id="{76112195-1E3D-543F-F968-72A97F258EA7}"/>
+              </a:ext>
+            </a:extLst>
+          </p:cNvPr>
+          <p:cNvCxnSpPr>
+            <a:cxnSpLocks/>
+            <a:stCxn id="33" idx="2"/>
+            <a:endCxn id="11" idx="0"/>
+          </p:cNvCxnSpPr>
+          <p:nvPr/>
+        </p:nvCxnSpPr>
+        <p:spPr>
+          <a:xfrm flipH="1">
+            <a:off x="7396801" y="3741487"/>
+            <a:ext cx="2373" cy="539209"/>
+          </a:xfrm>
+          <a:prstGeom prst="straightConnector1">
+            <a:avLst/>
+          </a:prstGeom>
+          <a:ln w="57150">
+            <a:solidFill>
+              <a:schemeClr val="accent1">
+                <a:lumMod val="75000"/>
+              </a:schemeClr>
+            </a:solidFill>
+            <a:tailEnd type="triangle"/>
+          </a:ln>
+        </p:spPr>
+        <p:style>
+          <a:lnRef idx="1">
+            <a:schemeClr val="accent1"/>
+          </a:lnRef>
+          <a:fillRef idx="0">
+            <a:schemeClr val="accent1"/>
+          </a:fillRef>
+          <a:effectRef idx="0">
+            <a:schemeClr val="accent1"/>
+          </a:effectRef>
+          <a:fontRef idx="minor">
+            <a:schemeClr val="tx1"/>
+          </a:fontRef>
+        </p:style>
+      </p:cxnSp>
+      <p:sp>
+        <p:nvSpPr>
+          <p:cNvPr id="104" name="Rectangle 103">
+            <a:extLst>
+              <a:ext uri="{FF2B5EF4-FFF2-40B4-BE49-F238E27FC236}">
+                <a16:creationId xmlns:a16="http://schemas.microsoft.com/office/drawing/2014/main" id="{75EE75BE-3612-F551-D438-F7DB493841A6}"/>
+              </a:ext>
+            </a:extLst>
+          </p:cNvPr>
+          <p:cNvSpPr/>
+          <p:nvPr/>
+        </p:nvSpPr>
+        <p:spPr>
+          <a:xfrm>
+            <a:off x="7668335" y="2351577"/>
+            <a:ext cx="1049965" cy="267977"/>
+          </a:xfrm>
+          <a:prstGeom prst="rect">
+            <a:avLst/>
+          </a:prstGeom>
+          <a:ln w="6350">
+            <a:solidFill>
+              <a:schemeClr val="tx1"/>
+            </a:solidFill>
+          </a:ln>
+        </p:spPr>
+        <p:style>
+          <a:lnRef idx="2">
+            <a:schemeClr val="accent6"/>
+          </a:lnRef>
+          <a:fillRef idx="1">
+            <a:schemeClr val="lt1"/>
+          </a:fillRef>
+          <a:effectRef idx="0">
+            <a:schemeClr val="accent6"/>
+          </a:effectRef>
+          <a:fontRef idx="minor">
+            <a:schemeClr val="dk1"/>
+          </a:fontRef>
+        </p:style>
+        <p:txBody>
+          <a:bodyPr rtlCol="0" anchor="ctr"/>
+          <a:lstStyle/>
+          <a:p>
+            <a:pPr algn="ctr"/>
+            <a:r>
+              <a:rPr lang="en-US" sz="1200" b="1" noProof="1">
+                <a:latin typeface="Arial" panose="020B0604020202020204" pitchFamily="34" charset="0"/>
+                <a:cs typeface="Arial" panose="020B0604020202020204" pitchFamily="34" charset="0"/>
+              </a:rPr>
+              <a:t>XGBoost</a:t>
+            </a:r>
+            <a:endParaRPr lang="en-MY" sz="1100" dirty="0">
+              <a:latin typeface="Arial" panose="020B0604020202020204" pitchFamily="34" charset="0"/>
+              <a:cs typeface="Arial" panose="020B0604020202020204" pitchFamily="34" charset="0"/>
+            </a:endParaRPr>
+          </a:p>
+        </p:txBody>
+      </p:sp>
+      <p:sp>
+        <p:nvSpPr>
+          <p:cNvPr id="113" name="Rectangle 112">
+            <a:extLst>
+              <a:ext uri="{FF2B5EF4-FFF2-40B4-BE49-F238E27FC236}">
+                <a16:creationId xmlns:a16="http://schemas.microsoft.com/office/drawing/2014/main" id="{258DF7AD-871B-3DF9-911E-3B52132E3B48}"/>
+              </a:ext>
+            </a:extLst>
+          </p:cNvPr>
+          <p:cNvSpPr/>
+          <p:nvPr/>
+        </p:nvSpPr>
+        <p:spPr>
+          <a:xfrm>
+            <a:off x="7733117" y="2895206"/>
+            <a:ext cx="920400" cy="237596"/>
+          </a:xfrm>
+          <a:prstGeom prst="rect">
+            <a:avLst/>
+          </a:prstGeom>
+          <a:ln w="6350">
+            <a:solidFill>
+              <a:schemeClr val="tx1"/>
+            </a:solidFill>
+          </a:ln>
+        </p:spPr>
+        <p:style>
+          <a:lnRef idx="2">
+            <a:schemeClr val="accent6"/>
+          </a:lnRef>
+          <a:fillRef idx="1">
+            <a:schemeClr val="lt1"/>
+          </a:fillRef>
+          <a:effectRef idx="0">
+            <a:schemeClr val="accent6"/>
+          </a:effectRef>
+          <a:fontRef idx="minor">
+            <a:schemeClr val="dk1"/>
+          </a:fontRef>
+        </p:style>
+        <p:txBody>
+          <a:bodyPr rtlCol="0" anchor="ctr"/>
+          <a:lstStyle/>
+          <a:p>
+            <a:pPr algn="ctr"/>
+            <a:r>
+              <a:rPr lang="en-US" sz="1200" dirty="0">
+                <a:latin typeface="Arial" panose="020B0604020202020204" pitchFamily="34" charset="0"/>
+                <a:cs typeface="Arial" panose="020B0604020202020204" pitchFamily="34" charset="0"/>
+              </a:rPr>
+              <a:t>Cluster</a:t>
+            </a:r>
+            <a:endParaRPr lang="en-MY" sz="1600" dirty="0">
+              <a:latin typeface="Arial" panose="020B0604020202020204" pitchFamily="34" charset="0"/>
+              <a:cs typeface="Arial" panose="020B0604020202020204" pitchFamily="34" charset="0"/>
+            </a:endParaRPr>
+          </a:p>
+        </p:txBody>
+      </p:sp>
+      <p:cxnSp>
+        <p:nvCxnSpPr>
+          <p:cNvPr id="114" name="Straight Arrow Connector 113">
+            <a:extLst>
+              <a:ext uri="{FF2B5EF4-FFF2-40B4-BE49-F238E27FC236}">
+                <a16:creationId xmlns:a16="http://schemas.microsoft.com/office/drawing/2014/main" id="{4360D670-94B6-F36D-97D7-090E553DFF32}"/>
+              </a:ext>
+            </a:extLst>
+          </p:cNvPr>
+          <p:cNvCxnSpPr>
+            <a:cxnSpLocks/>
+            <a:stCxn id="104" idx="2"/>
+            <a:endCxn id="113" idx="0"/>
+          </p:cNvCxnSpPr>
+          <p:nvPr/>
+        </p:nvCxnSpPr>
+        <p:spPr>
+          <a:xfrm flipH="1">
+            <a:off x="8193317" y="2619554"/>
+            <a:ext cx="1" cy="275652"/>
+          </a:xfrm>
+          <a:prstGeom prst="straightConnector1">
+            <a:avLst/>
+          </a:prstGeom>
+          <a:ln>
+            <a:solidFill>
+              <a:schemeClr val="tx2"/>
+            </a:solidFill>
+            <a:tailEnd type="triangle"/>
+          </a:ln>
+        </p:spPr>
+        <p:style>
+          <a:lnRef idx="1">
+            <a:schemeClr val="accent1"/>
+          </a:lnRef>
+          <a:fillRef idx="0">
+            <a:schemeClr val="accent1"/>
+          </a:fillRef>
+          <a:effectRef idx="0">
+            <a:schemeClr val="accent1"/>
+          </a:effectRef>
+          <a:fontRef idx="minor">
+            <a:schemeClr val="tx1"/>
+          </a:fontRef>
+        </p:style>
+      </p:cxnSp>
+      <p:cxnSp>
+        <p:nvCxnSpPr>
+          <p:cNvPr id="68" name="Straight Arrow Connector 67">
+            <a:extLst>
+              <a:ext uri="{FF2B5EF4-FFF2-40B4-BE49-F238E27FC236}">
+                <a16:creationId xmlns:a16="http://schemas.microsoft.com/office/drawing/2014/main" id="{9AA1769A-EBD1-F1AB-D7BA-8CFE6EE9A7EE}"/>
+              </a:ext>
+            </a:extLst>
+          </p:cNvPr>
+          <p:cNvCxnSpPr>
+            <a:cxnSpLocks/>
+            <a:stCxn id="11" idx="1"/>
+            <a:endCxn id="3" idx="3"/>
+          </p:cNvCxnSpPr>
+          <p:nvPr/>
+        </p:nvCxnSpPr>
+        <p:spPr>
+          <a:xfrm flipH="1" flipV="1">
+            <a:off x="3514495" y="3741487"/>
+            <a:ext cx="2144530" cy="837962"/>
+          </a:xfrm>
+          <a:prstGeom prst="straightConnector1">
+            <a:avLst/>
+          </a:prstGeom>
+          <a:ln w="57150">
+            <a:solidFill>
+              <a:schemeClr val="accent1">
+                <a:lumMod val="75000"/>
+              </a:schemeClr>
+            </a:solidFill>
+            <a:tailEnd type="triangle"/>
+          </a:ln>
+        </p:spPr>
+        <p:style>
+          <a:lnRef idx="1">
+            <a:schemeClr val="accent1"/>
+          </a:lnRef>
+          <a:fillRef idx="0">
+            <a:schemeClr val="accent1"/>
+          </a:fillRef>
+          <a:effectRef idx="0">
+            <a:schemeClr val="accent1"/>
+          </a:effectRef>
+          <a:fontRef idx="minor">
+            <a:schemeClr val="tx1"/>
+          </a:fontRef>
+        </p:style>
+      </p:cxnSp>
+      <p:sp>
+        <p:nvSpPr>
+          <p:cNvPr id="78" name="Rectangle 77">
+            <a:extLst>
+              <a:ext uri="{FF2B5EF4-FFF2-40B4-BE49-F238E27FC236}">
+                <a16:creationId xmlns:a16="http://schemas.microsoft.com/office/drawing/2014/main" id="{6BD9EFA7-3A93-1EC0-8F25-C4BA8C18C392}"/>
+              </a:ext>
+            </a:extLst>
+          </p:cNvPr>
+          <p:cNvSpPr/>
+          <p:nvPr/>
+        </p:nvSpPr>
+        <p:spPr>
+          <a:xfrm>
+            <a:off x="6129892" y="5349020"/>
+            <a:ext cx="2541886" cy="288020"/>
+          </a:xfrm>
+          <a:prstGeom prst="rect">
+            <a:avLst/>
+          </a:prstGeom>
+          <a:ln>
+            <a:solidFill>
+              <a:schemeClr val="tx1"/>
+            </a:solidFill>
+          </a:ln>
+        </p:spPr>
+        <p:style>
+          <a:lnRef idx="2">
+            <a:schemeClr val="accent6"/>
+          </a:lnRef>
+          <a:fillRef idx="1">
+            <a:schemeClr val="lt1"/>
+          </a:fillRef>
+          <a:effectRef idx="0">
+            <a:schemeClr val="accent6"/>
+          </a:effectRef>
+          <a:fontRef idx="minor">
+            <a:schemeClr val="dk1"/>
+          </a:fontRef>
+        </p:style>
+        <p:txBody>
+          <a:bodyPr rtlCol="0" anchor="ctr"/>
+          <a:lstStyle/>
+          <a:p>
+            <a:pPr algn="ctr"/>
+            <a:r>
+              <a:rPr lang="en-US" sz="1600" dirty="0"/>
+              <a:t>UPDATE &amp; SAVE MODEL</a:t>
+            </a:r>
+            <a:endParaRPr lang="en-MY" sz="1600" dirty="0"/>
+          </a:p>
+        </p:txBody>
+      </p:sp>
+      <p:cxnSp>
+        <p:nvCxnSpPr>
+          <p:cNvPr id="79" name="Straight Arrow Connector 78">
+            <a:extLst>
+              <a:ext uri="{FF2B5EF4-FFF2-40B4-BE49-F238E27FC236}">
+                <a16:creationId xmlns:a16="http://schemas.microsoft.com/office/drawing/2014/main" id="{7F948B9D-EA3B-0B8F-331F-DE2090EF22C2}"/>
+              </a:ext>
+            </a:extLst>
+          </p:cNvPr>
+          <p:cNvCxnSpPr>
+            <a:cxnSpLocks/>
+            <a:stCxn id="11" idx="2"/>
+            <a:endCxn id="78" idx="0"/>
+          </p:cNvCxnSpPr>
+          <p:nvPr/>
+        </p:nvCxnSpPr>
+        <p:spPr>
+          <a:xfrm>
+            <a:off x="7396801" y="4878202"/>
+            <a:ext cx="4034" cy="470818"/>
+          </a:xfrm>
+          <a:prstGeom prst="straightConnector1">
+            <a:avLst/>
+          </a:prstGeom>
+          <a:ln w="57150">
+            <a:solidFill>
+              <a:schemeClr val="accent1">
+                <a:lumMod val="75000"/>
+              </a:schemeClr>
+            </a:solidFill>
+            <a:tailEnd type="triangle"/>
+          </a:ln>
+        </p:spPr>
+        <p:style>
+          <a:lnRef idx="1">
+            <a:schemeClr val="accent1"/>
+          </a:lnRef>
+          <a:fillRef idx="0">
+            <a:schemeClr val="accent1"/>
+          </a:fillRef>
+          <a:effectRef idx="0">
+            <a:schemeClr val="accent1"/>
+          </a:effectRef>
+          <a:fontRef idx="minor">
+            <a:schemeClr val="tx1"/>
+          </a:fontRef>
+        </p:style>
+      </p:cxnSp>
+      <p:cxnSp>
+        <p:nvCxnSpPr>
+          <p:cNvPr id="87" name="Straight Arrow Connector 86">
+            <a:extLst>
+              <a:ext uri="{FF2B5EF4-FFF2-40B4-BE49-F238E27FC236}">
+                <a16:creationId xmlns:a16="http://schemas.microsoft.com/office/drawing/2014/main" id="{BE036D93-D98B-C382-E296-F52A73A7B557}"/>
+              </a:ext>
+            </a:extLst>
+          </p:cNvPr>
+          <p:cNvCxnSpPr>
+            <a:cxnSpLocks/>
+            <a:stCxn id="3" idx="0"/>
+            <a:endCxn id="15" idx="2"/>
+          </p:cNvCxnSpPr>
+          <p:nvPr/>
+        </p:nvCxnSpPr>
+        <p:spPr>
+          <a:xfrm flipH="1" flipV="1">
+            <a:off x="2394189" y="2916773"/>
+            <a:ext cx="1" cy="585265"/>
+          </a:xfrm>
+          <a:prstGeom prst="straightConnector1">
+            <a:avLst/>
+          </a:prstGeom>
+          <a:ln w="57150">
+            <a:solidFill>
+              <a:schemeClr val="accent1">
+                <a:lumMod val="75000"/>
+              </a:schemeClr>
+            </a:solidFill>
+            <a:tailEnd type="triangle"/>
+          </a:ln>
+        </p:spPr>
+        <p:style>
+          <a:lnRef idx="1">
+            <a:schemeClr val="accent1"/>
+          </a:lnRef>
+          <a:fillRef idx="0">
+            <a:schemeClr val="accent1"/>
+          </a:fillRef>
+          <a:effectRef idx="0">
+            <a:schemeClr val="accent1"/>
+          </a:effectRef>
+          <a:fontRef idx="minor">
+            <a:schemeClr val="tx1"/>
+          </a:fontRef>
+        </p:style>
+      </p:cxnSp>
+      <p:sp>
+        <p:nvSpPr>
+          <p:cNvPr id="100" name="Rectangle 99">
+            <a:extLst>
+              <a:ext uri="{FF2B5EF4-FFF2-40B4-BE49-F238E27FC236}">
+                <a16:creationId xmlns:a16="http://schemas.microsoft.com/office/drawing/2014/main" id="{25CCC409-F1AE-CF70-A85B-6F6D5652E4B1}"/>
+              </a:ext>
+            </a:extLst>
+          </p:cNvPr>
+          <p:cNvSpPr/>
+          <p:nvPr/>
+        </p:nvSpPr>
+        <p:spPr>
+          <a:xfrm>
+            <a:off x="32941" y="100051"/>
+            <a:ext cx="2647950" cy="316961"/>
+          </a:xfrm>
+          <a:prstGeom prst="rect">
+            <a:avLst/>
+          </a:prstGeom>
+          <a:ln>
+            <a:noFill/>
+          </a:ln>
+        </p:spPr>
+        <p:style>
+          <a:lnRef idx="2">
+            <a:schemeClr val="accent6"/>
+          </a:lnRef>
+          <a:fillRef idx="1">
+            <a:schemeClr val="lt1"/>
+          </a:fillRef>
+          <a:effectRef idx="0">
+            <a:schemeClr val="accent6"/>
+          </a:effectRef>
+          <a:fontRef idx="minor">
+            <a:schemeClr val="dk1"/>
+          </a:fontRef>
+        </p:style>
+        <p:txBody>
+          <a:bodyPr rtlCol="0" anchor="ctr"/>
+          <a:lstStyle/>
+          <a:p>
+            <a:pPr algn="ctr"/>
+            <a:r>
+              <a:rPr lang="en-MY" sz="1400" b="1" dirty="0"/>
+              <a:t>MACHINE LEARNING PIPELINE</a:t>
+            </a:r>
+          </a:p>
+        </p:txBody>
+      </p:sp>
+      <p:sp>
+        <p:nvSpPr>
+          <p:cNvPr id="48" name="Rectangle 47">
+            <a:extLst>
+              <a:ext uri="{FF2B5EF4-FFF2-40B4-BE49-F238E27FC236}">
+                <a16:creationId xmlns:a16="http://schemas.microsoft.com/office/drawing/2014/main" id="{3907F865-3B7A-FDD9-000D-9F76F56AD918}"/>
+              </a:ext>
+            </a:extLst>
+          </p:cNvPr>
+          <p:cNvSpPr/>
+          <p:nvPr/>
+        </p:nvSpPr>
+        <p:spPr>
+          <a:xfrm>
+            <a:off x="5866638" y="1653081"/>
+            <a:ext cx="3076575" cy="460237"/>
+          </a:xfrm>
+          <a:prstGeom prst="rect">
+            <a:avLst/>
+          </a:prstGeom>
+          <a:solidFill>
+            <a:schemeClr val="bg1"/>
+          </a:solidFill>
+          <a:ln>
+            <a:solidFill>
+              <a:schemeClr val="tx1"/>
+            </a:solidFill>
+          </a:ln>
+        </p:spPr>
+        <p:style>
+          <a:lnRef idx="2">
+            <a:schemeClr val="accent6"/>
+          </a:lnRef>
+          <a:fillRef idx="1">
+            <a:schemeClr val="lt1"/>
+          </a:fillRef>
+          <a:effectRef idx="0">
+            <a:schemeClr val="accent6"/>
+          </a:effectRef>
+          <a:fontRef idx="minor">
+            <a:schemeClr val="dk1"/>
+          </a:fontRef>
+        </p:style>
+        <p:txBody>
+          <a:bodyPr rtlCol="0" anchor="ctr"/>
+          <a:lstStyle/>
+          <a:p>
+            <a:pPr algn="ctr"/>
+            <a:r>
+              <a:rPr lang="en-US" sz="1600" b="1" dirty="0"/>
+              <a:t>ML </a:t>
+            </a:r>
+            <a:r>
+              <a:rPr lang="en-US" sz="1600" b="1" dirty="0">
+                <a:latin typeface="Arial" panose="020B0604020202020204" pitchFamily="34" charset="0"/>
+                <a:cs typeface="Arial" panose="020B0604020202020204" pitchFamily="34" charset="0"/>
+              </a:rPr>
+              <a:t>MODEL</a:t>
+            </a:r>
+            <a:endParaRPr lang="en-MY" sz="1600" b="1" dirty="0">
+              <a:latin typeface="Arial" panose="020B0604020202020204" pitchFamily="34" charset="0"/>
+              <a:cs typeface="Arial" panose="020B0604020202020204" pitchFamily="34" charset="0"/>
+            </a:endParaRPr>
+          </a:p>
+        </p:txBody>
+      </p:sp>
+      <p:cxnSp>
+        <p:nvCxnSpPr>
+          <p:cNvPr id="9" name="Straight Arrow Connector 8">
+            <a:extLst>
+              <a:ext uri="{FF2B5EF4-FFF2-40B4-BE49-F238E27FC236}">
+                <a16:creationId xmlns:a16="http://schemas.microsoft.com/office/drawing/2014/main" id="{5E92F43E-03F0-E2B1-0F62-774436E18017}"/>
+              </a:ext>
+            </a:extLst>
+          </p:cNvPr>
+          <p:cNvCxnSpPr>
+            <a:cxnSpLocks/>
+            <a:stCxn id="113" idx="2"/>
+            <a:endCxn id="17" idx="0"/>
+          </p:cNvCxnSpPr>
+          <p:nvPr/>
+        </p:nvCxnSpPr>
+        <p:spPr>
+          <a:xfrm>
+            <a:off x="8193317" y="3132802"/>
+            <a:ext cx="0" cy="191980"/>
+          </a:xfrm>
+          <a:prstGeom prst="straightConnector1">
+            <a:avLst/>
+          </a:prstGeom>
+          <a:ln>
+            <a:solidFill>
+              <a:schemeClr val="tx2"/>
+            </a:solidFill>
+            <a:tailEnd type="triangle"/>
+          </a:ln>
+        </p:spPr>
+        <p:style>
+          <a:lnRef idx="1">
+            <a:schemeClr val="accent1"/>
+          </a:lnRef>
+          <a:fillRef idx="0">
+            <a:schemeClr val="accent1"/>
+          </a:fillRef>
+          <a:effectRef idx="0">
+            <a:schemeClr val="accent1"/>
+          </a:effectRef>
+          <a:fontRef idx="minor">
+            <a:schemeClr val="tx1"/>
+          </a:fontRef>
+        </p:style>
+      </p:cxnSp>
+      <p:sp>
+        <p:nvSpPr>
+          <p:cNvPr id="17" name="Rectangle 16">
+            <a:extLst>
+              <a:ext uri="{FF2B5EF4-FFF2-40B4-BE49-F238E27FC236}">
+                <a16:creationId xmlns:a16="http://schemas.microsoft.com/office/drawing/2014/main" id="{13405ADF-43F7-18B8-FF61-F5B1361CDE36}"/>
+              </a:ext>
+            </a:extLst>
+          </p:cNvPr>
+          <p:cNvSpPr/>
+          <p:nvPr/>
+        </p:nvSpPr>
+        <p:spPr>
+          <a:xfrm>
+            <a:off x="7733117" y="3324782"/>
+            <a:ext cx="920400" cy="237596"/>
+          </a:xfrm>
+          <a:prstGeom prst="rect">
+            <a:avLst/>
+          </a:prstGeom>
+          <a:ln w="6350">
+            <a:solidFill>
+              <a:schemeClr val="tx1"/>
+            </a:solidFill>
+          </a:ln>
+        </p:spPr>
+        <p:style>
+          <a:lnRef idx="2">
+            <a:schemeClr val="accent6"/>
+          </a:lnRef>
+          <a:fillRef idx="1">
+            <a:schemeClr val="lt1"/>
+          </a:fillRef>
+          <a:effectRef idx="0">
+            <a:schemeClr val="accent6"/>
+          </a:effectRef>
+          <a:fontRef idx="minor">
+            <a:schemeClr val="dk1"/>
+          </a:fontRef>
+        </p:style>
+        <p:txBody>
+          <a:bodyPr rtlCol="0" anchor="ctr"/>
+          <a:lstStyle/>
+          <a:p>
+            <a:pPr algn="ctr"/>
+            <a:r>
+              <a:rPr lang="en-US" sz="1200" dirty="0">
+                <a:latin typeface="Arial" panose="020B0604020202020204" pitchFamily="34" charset="0"/>
+                <a:cs typeface="Arial" panose="020B0604020202020204" pitchFamily="34" charset="0"/>
+              </a:rPr>
+              <a:t>Section</a:t>
+            </a:r>
+            <a:endParaRPr lang="en-MY" sz="1600" dirty="0">
+              <a:latin typeface="Arial" panose="020B0604020202020204" pitchFamily="34" charset="0"/>
+              <a:cs typeface="Arial" panose="020B0604020202020204" pitchFamily="34" charset="0"/>
+            </a:endParaRPr>
+          </a:p>
+        </p:txBody>
+      </p:sp>
+      <p:cxnSp>
+        <p:nvCxnSpPr>
+          <p:cNvPr id="32" name="Straight Arrow Connector 31">
+            <a:extLst>
+              <a:ext uri="{FF2B5EF4-FFF2-40B4-BE49-F238E27FC236}">
+                <a16:creationId xmlns:a16="http://schemas.microsoft.com/office/drawing/2014/main" id="{A57B9C79-4FF9-C00B-2017-6A66F5B48B1D}"/>
+              </a:ext>
+            </a:extLst>
+          </p:cNvPr>
+          <p:cNvCxnSpPr>
+            <a:cxnSpLocks/>
+            <a:endCxn id="78" idx="3"/>
+          </p:cNvCxnSpPr>
+          <p:nvPr/>
+        </p:nvCxnSpPr>
+        <p:spPr>
+          <a:xfrm flipH="1">
+            <a:off x="8671778" y="5484012"/>
+            <a:ext cx="1626201" cy="9018"/>
+          </a:xfrm>
+          <a:prstGeom prst="straightConnector1">
+            <a:avLst/>
+          </a:prstGeom>
+          <a:ln w="57150">
+            <a:solidFill>
+              <a:schemeClr val="accent1">
+                <a:lumMod val="75000"/>
+              </a:schemeClr>
+            </a:solidFill>
+            <a:tailEnd type="triangle"/>
+          </a:ln>
+        </p:spPr>
+        <p:style>
+          <a:lnRef idx="1">
+            <a:schemeClr val="accent1"/>
+          </a:lnRef>
+          <a:fillRef idx="0">
+            <a:schemeClr val="accent1"/>
+          </a:fillRef>
+          <a:effectRef idx="0">
+            <a:schemeClr val="accent1"/>
+          </a:effectRef>
+          <a:fontRef idx="minor">
+            <a:schemeClr val="tx1"/>
+          </a:fontRef>
+        </p:style>
+      </p:cxnSp>
+      <p:cxnSp>
+        <p:nvCxnSpPr>
+          <p:cNvPr id="36" name="Straight Arrow Connector 35">
+            <a:extLst>
+              <a:ext uri="{FF2B5EF4-FFF2-40B4-BE49-F238E27FC236}">
+                <a16:creationId xmlns:a16="http://schemas.microsoft.com/office/drawing/2014/main" id="{1BA3F821-0DE9-BA71-5F0E-568D72DD7461}"/>
+              </a:ext>
+            </a:extLst>
+          </p:cNvPr>
+          <p:cNvCxnSpPr>
+            <a:cxnSpLocks/>
+            <a:endCxn id="48" idx="3"/>
+          </p:cNvCxnSpPr>
+          <p:nvPr/>
+        </p:nvCxnSpPr>
+        <p:spPr>
+          <a:xfrm flipH="1">
+            <a:off x="8943213" y="1883199"/>
+            <a:ext cx="1341564" cy="1"/>
+          </a:xfrm>
+          <a:prstGeom prst="straightConnector1">
+            <a:avLst/>
+          </a:prstGeom>
+          <a:ln w="28575">
+            <a:solidFill>
+              <a:schemeClr val="tx1"/>
+            </a:solidFill>
+            <a:tailEnd type="triangle"/>
+          </a:ln>
+        </p:spPr>
+        <p:style>
+          <a:lnRef idx="1">
+            <a:schemeClr val="accent1"/>
+          </a:lnRef>
+          <a:fillRef idx="0">
+            <a:schemeClr val="accent1"/>
+          </a:fillRef>
+          <a:effectRef idx="0">
+            <a:schemeClr val="accent1"/>
+          </a:effectRef>
+          <a:fontRef idx="minor">
+            <a:schemeClr val="tx1"/>
+          </a:fontRef>
+        </p:style>
+      </p:cxnSp>
+      <p:sp>
+        <p:nvSpPr>
+          <p:cNvPr id="70" name="Rectangle 69">
+            <a:extLst>
+              <a:ext uri="{FF2B5EF4-FFF2-40B4-BE49-F238E27FC236}">
+                <a16:creationId xmlns:a16="http://schemas.microsoft.com/office/drawing/2014/main" id="{CA3494B0-09CE-651B-735D-F376AEFC5A91}"/>
+              </a:ext>
+            </a:extLst>
+          </p:cNvPr>
+          <p:cNvSpPr/>
+          <p:nvPr/>
+        </p:nvSpPr>
+        <p:spPr>
+          <a:xfrm>
+            <a:off x="3210375" y="1803916"/>
+            <a:ext cx="1590499" cy="461665"/>
+          </a:xfrm>
+          <a:prstGeom prst="rect">
+            <a:avLst/>
+          </a:prstGeom>
+          <a:noFill/>
+        </p:spPr>
+        <p:txBody>
+          <a:bodyPr wrap="none" lIns="91440" tIns="45720" rIns="91440" bIns="45720">
+            <a:spAutoFit/>
+          </a:bodyPr>
+          <a:lstStyle/>
+          <a:p>
+            <a:pPr algn="ctr"/>
+            <a:r>
+              <a:rPr lang="en-US" sz="1200" cap="none" spc="0" noProof="1">
+                <a:ln w="0"/>
+                <a:solidFill>
+                  <a:schemeClr val="tx1"/>
+                </a:solidFill>
+                <a:effectLst>
+                  <a:outerShdw blurRad="38100" dist="19050" dir="2700000" algn="tl" rotWithShape="0">
+                    <a:schemeClr val="dk1">
+                      <a:alpha val="40000"/>
+                    </a:schemeClr>
+                  </a:outerShdw>
+                </a:effectLst>
+                <a:latin typeface="Arial" panose="020B0604020202020204" pitchFamily="34" charset="0"/>
+                <a:cs typeface="Arial" panose="020B0604020202020204" pitchFamily="34" charset="0"/>
+              </a:rPr>
+              <a:t>RETRIVE </a:t>
+            </a:r>
+          </a:p>
+          <a:p>
+            <a:pPr algn="ctr"/>
+            <a:r>
+              <a:rPr lang="en-US" sz="1200" cap="none" spc="0" noProof="1">
+                <a:ln w="0"/>
+                <a:solidFill>
+                  <a:schemeClr val="tx1"/>
+                </a:solidFill>
+                <a:effectLst>
+                  <a:outerShdw blurRad="38100" dist="19050" dir="2700000" algn="tl" rotWithShape="0">
+                    <a:schemeClr val="dk1">
+                      <a:alpha val="40000"/>
+                    </a:schemeClr>
+                  </a:outerShdw>
+                </a:effectLst>
+                <a:latin typeface="Arial" panose="020B0604020202020204" pitchFamily="34" charset="0"/>
+                <a:cs typeface="Arial" panose="020B0604020202020204" pitchFamily="34" charset="0"/>
+              </a:rPr>
+              <a:t>[new_equipment.pkl]</a:t>
+            </a:r>
+          </a:p>
+        </p:txBody>
+      </p:sp>
+      <p:cxnSp>
+        <p:nvCxnSpPr>
+          <p:cNvPr id="135" name="Straight Connector 134">
+            <a:extLst>
+              <a:ext uri="{FF2B5EF4-FFF2-40B4-BE49-F238E27FC236}">
+                <a16:creationId xmlns:a16="http://schemas.microsoft.com/office/drawing/2014/main" id="{4E914B67-FA78-E37B-3115-9588220D3D12}"/>
+              </a:ext>
+            </a:extLst>
+          </p:cNvPr>
+          <p:cNvCxnSpPr>
+            <a:cxnSpLocks/>
+          </p:cNvCxnSpPr>
+          <p:nvPr/>
+        </p:nvCxnSpPr>
+        <p:spPr>
+          <a:xfrm>
+            <a:off x="10276309" y="1883199"/>
+            <a:ext cx="21670" cy="3600813"/>
+          </a:xfrm>
+          <a:prstGeom prst="line">
+            <a:avLst/>
+          </a:prstGeom>
+          <a:ln w="57150">
+            <a:solidFill>
+              <a:schemeClr val="accent1">
+                <a:lumMod val="75000"/>
+              </a:schemeClr>
+            </a:solidFill>
+          </a:ln>
+        </p:spPr>
+        <p:style>
+          <a:lnRef idx="1">
+            <a:schemeClr val="accent1"/>
+          </a:lnRef>
+          <a:fillRef idx="0">
+            <a:schemeClr val="accent1"/>
+          </a:fillRef>
+          <a:effectRef idx="0">
+            <a:schemeClr val="accent1"/>
+          </a:effectRef>
+          <a:fontRef idx="minor">
+            <a:schemeClr val="tx1"/>
+          </a:fontRef>
+        </p:style>
+      </p:cxnSp>
+      <p:sp>
+        <p:nvSpPr>
+          <p:cNvPr id="182" name="Oval 181">
+            <a:extLst>
+              <a:ext uri="{FF2B5EF4-FFF2-40B4-BE49-F238E27FC236}">
+                <a16:creationId xmlns:a16="http://schemas.microsoft.com/office/drawing/2014/main" id="{1F1C4E4E-01ED-0629-31A9-4AC084D82F1D}"/>
+              </a:ext>
+            </a:extLst>
+          </p:cNvPr>
+          <p:cNvSpPr/>
+          <p:nvPr/>
+        </p:nvSpPr>
+        <p:spPr>
+          <a:xfrm>
+            <a:off x="7573894" y="1040528"/>
+            <a:ext cx="457200" cy="432855"/>
+          </a:xfrm>
+          <a:prstGeom prst="ellipse">
+            <a:avLst/>
+          </a:prstGeom>
+          <a:solidFill>
+            <a:srgbClr val="FFFFAF"/>
+          </a:solidFill>
+        </p:spPr>
+        <p:style>
+          <a:lnRef idx="2">
+            <a:schemeClr val="accent1">
+              <a:shade val="15000"/>
+            </a:schemeClr>
+          </a:lnRef>
+          <a:fillRef idx="1">
+            <a:schemeClr val="accent1"/>
+          </a:fillRef>
+          <a:effectRef idx="0">
+            <a:schemeClr val="accent1"/>
+          </a:effectRef>
+          <a:fontRef idx="minor">
+            <a:schemeClr val="lt1"/>
+          </a:fontRef>
+        </p:style>
+        <p:txBody>
+          <a:bodyPr rtlCol="0" anchor="ctr"/>
+          <a:lstStyle/>
+          <a:p>
+            <a:pPr algn="ctr"/>
+            <a:r>
+              <a:rPr lang="en-MY" b="1" dirty="0">
+                <a:solidFill>
+                  <a:sysClr val="windowText" lastClr="000000"/>
+                </a:solidFill>
+              </a:rPr>
+              <a:t>1</a:t>
+            </a:r>
+          </a:p>
+        </p:txBody>
+      </p:sp>
+      <p:sp>
+        <p:nvSpPr>
+          <p:cNvPr id="183" name="Oval 182">
+            <a:extLst>
+              <a:ext uri="{FF2B5EF4-FFF2-40B4-BE49-F238E27FC236}">
+                <a16:creationId xmlns:a16="http://schemas.microsoft.com/office/drawing/2014/main" id="{FCB62BBF-02DD-7CD1-BC5A-1F7ACB214356}"/>
+              </a:ext>
+            </a:extLst>
+          </p:cNvPr>
+          <p:cNvSpPr/>
+          <p:nvPr/>
+        </p:nvSpPr>
+        <p:spPr>
+          <a:xfrm>
+            <a:off x="4576888" y="4445347"/>
+            <a:ext cx="457200" cy="432855"/>
+          </a:xfrm>
+          <a:prstGeom prst="ellipse">
+            <a:avLst/>
+          </a:prstGeom>
+          <a:solidFill>
+            <a:srgbClr val="FFFFAF"/>
+          </a:solidFill>
+        </p:spPr>
+        <p:style>
+          <a:lnRef idx="2">
+            <a:schemeClr val="accent1">
+              <a:shade val="15000"/>
+            </a:schemeClr>
+          </a:lnRef>
+          <a:fillRef idx="1">
+            <a:schemeClr val="accent1"/>
+          </a:fillRef>
+          <a:effectRef idx="0">
+            <a:schemeClr val="accent1"/>
+          </a:effectRef>
+          <a:fontRef idx="minor">
+            <a:schemeClr val="lt1"/>
+          </a:fontRef>
+        </p:style>
+        <p:txBody>
+          <a:bodyPr rtlCol="0" anchor="ctr"/>
+          <a:lstStyle/>
+          <a:p>
+            <a:pPr algn="ctr"/>
+            <a:r>
+              <a:rPr lang="en-MY" b="1" dirty="0">
+                <a:solidFill>
+                  <a:sysClr val="windowText" lastClr="000000"/>
+                </a:solidFill>
+              </a:rPr>
+              <a:t>2</a:t>
+            </a:r>
+          </a:p>
+        </p:txBody>
+      </p:sp>
+      <p:sp>
+        <p:nvSpPr>
+          <p:cNvPr id="184" name="Oval 183">
+            <a:extLst>
+              <a:ext uri="{FF2B5EF4-FFF2-40B4-BE49-F238E27FC236}">
+                <a16:creationId xmlns:a16="http://schemas.microsoft.com/office/drawing/2014/main" id="{49EA3528-2301-BB15-D6C2-1FA2F342CD89}"/>
+              </a:ext>
+            </a:extLst>
+          </p:cNvPr>
+          <p:cNvSpPr/>
+          <p:nvPr/>
+        </p:nvSpPr>
+        <p:spPr>
+          <a:xfrm>
+            <a:off x="710902" y="2966839"/>
+            <a:ext cx="457200" cy="432855"/>
+          </a:xfrm>
+          <a:prstGeom prst="ellipse">
+            <a:avLst/>
+          </a:prstGeom>
+          <a:solidFill>
+            <a:srgbClr val="FFFFAF"/>
+          </a:solidFill>
+        </p:spPr>
+        <p:style>
+          <a:lnRef idx="2">
+            <a:schemeClr val="accent1">
+              <a:shade val="15000"/>
+            </a:schemeClr>
+          </a:lnRef>
+          <a:fillRef idx="1">
+            <a:schemeClr val="accent1"/>
+          </a:fillRef>
+          <a:effectRef idx="0">
+            <a:schemeClr val="accent1"/>
+          </a:effectRef>
+          <a:fontRef idx="minor">
+            <a:schemeClr val="lt1"/>
+          </a:fontRef>
+        </p:style>
+        <p:txBody>
+          <a:bodyPr rtlCol="0" anchor="ctr"/>
+          <a:lstStyle/>
+          <a:p>
+            <a:pPr algn="ctr"/>
+            <a:r>
+              <a:rPr lang="en-MY" b="1" dirty="0">
+                <a:solidFill>
+                  <a:sysClr val="windowText" lastClr="000000"/>
+                </a:solidFill>
+              </a:rPr>
+              <a:t>3</a:t>
+            </a:r>
+          </a:p>
+        </p:txBody>
+      </p:sp>
+      <p:cxnSp>
+        <p:nvCxnSpPr>
+          <p:cNvPr id="198" name="Straight Arrow Connector 197">
+            <a:extLst>
+              <a:ext uri="{FF2B5EF4-FFF2-40B4-BE49-F238E27FC236}">
+                <a16:creationId xmlns:a16="http://schemas.microsoft.com/office/drawing/2014/main" id="{13382E64-992A-5CDF-DA48-D564A9140A92}"/>
+              </a:ext>
+            </a:extLst>
+          </p:cNvPr>
+          <p:cNvCxnSpPr>
+            <a:cxnSpLocks/>
+          </p:cNvCxnSpPr>
+          <p:nvPr/>
+        </p:nvCxnSpPr>
+        <p:spPr>
+          <a:xfrm flipH="1">
+            <a:off x="8956415" y="1880759"/>
+            <a:ext cx="1341564" cy="1"/>
+          </a:xfrm>
+          <a:prstGeom prst="straightConnector1">
+            <a:avLst/>
+          </a:prstGeom>
+          <a:ln w="57150">
+            <a:solidFill>
+              <a:schemeClr val="accent1">
+                <a:lumMod val="75000"/>
+              </a:schemeClr>
+            </a:solidFill>
+            <a:tailEnd type="triangle"/>
+          </a:ln>
+        </p:spPr>
+        <p:style>
+          <a:lnRef idx="1">
+            <a:schemeClr val="accent1"/>
+          </a:lnRef>
+          <a:fillRef idx="0">
+            <a:schemeClr val="accent1"/>
+          </a:fillRef>
+          <a:effectRef idx="0">
+            <a:schemeClr val="accent1"/>
+          </a:effectRef>
+          <a:fontRef idx="minor">
+            <a:schemeClr val="tx1"/>
+          </a:fontRef>
+        </p:style>
+      </p:cxnSp>
+      <p:cxnSp>
+        <p:nvCxnSpPr>
+          <p:cNvPr id="199" name="Straight Arrow Connector 198">
+            <a:extLst>
+              <a:ext uri="{FF2B5EF4-FFF2-40B4-BE49-F238E27FC236}">
+                <a16:creationId xmlns:a16="http://schemas.microsoft.com/office/drawing/2014/main" id="{DF01BB12-1A72-61BA-C004-C1BE808E5888}"/>
+              </a:ext>
+            </a:extLst>
+          </p:cNvPr>
+          <p:cNvCxnSpPr>
+            <a:cxnSpLocks/>
+          </p:cNvCxnSpPr>
+          <p:nvPr/>
+        </p:nvCxnSpPr>
+        <p:spPr>
+          <a:xfrm>
+            <a:off x="7451637" y="894634"/>
+            <a:ext cx="12617" cy="758447"/>
+          </a:xfrm>
+          <a:prstGeom prst="straightConnector1">
+            <a:avLst/>
+          </a:prstGeom>
+          <a:ln w="57150">
+            <a:solidFill>
+              <a:schemeClr val="accent1">
+                <a:lumMod val="75000"/>
+              </a:schemeClr>
+            </a:solidFill>
+            <a:tailEnd type="triangle"/>
+          </a:ln>
+        </p:spPr>
+        <p:style>
+          <a:lnRef idx="1">
+            <a:schemeClr val="accent1"/>
+          </a:lnRef>
+          <a:fillRef idx="0">
+            <a:schemeClr val="accent1"/>
+          </a:fillRef>
+          <a:effectRef idx="0">
+            <a:schemeClr val="accent1"/>
+          </a:effectRef>
+          <a:fontRef idx="minor">
+            <a:schemeClr val="tx1"/>
+          </a:fontRef>
+        </p:style>
+      </p:cxnSp>
+      <p:sp>
+        <p:nvSpPr>
+          <p:cNvPr id="2" name="Rectangle 1">
+            <a:extLst>
+              <a:ext uri="{FF2B5EF4-FFF2-40B4-BE49-F238E27FC236}">
+                <a16:creationId xmlns:a16="http://schemas.microsoft.com/office/drawing/2014/main" id="{C9ABE3DD-7F1B-8CD5-4B7C-ACC971DC1871}"/>
+              </a:ext>
+            </a:extLst>
+          </p:cNvPr>
+          <p:cNvSpPr/>
+          <p:nvPr/>
+        </p:nvSpPr>
+        <p:spPr>
+          <a:xfrm>
+            <a:off x="6225238" y="2351577"/>
+            <a:ext cx="1247056" cy="267977"/>
+          </a:xfrm>
+          <a:prstGeom prst="rect">
+            <a:avLst/>
+          </a:prstGeom>
+          <a:ln w="6350">
+            <a:solidFill>
+              <a:schemeClr val="tx1"/>
+            </a:solidFill>
+          </a:ln>
+        </p:spPr>
+        <p:style>
+          <a:lnRef idx="2">
+            <a:schemeClr val="accent6"/>
+          </a:lnRef>
+          <a:fillRef idx="1">
+            <a:schemeClr val="lt1"/>
+          </a:fillRef>
+          <a:effectRef idx="0">
+            <a:schemeClr val="accent6"/>
+          </a:effectRef>
+          <a:fontRef idx="minor">
+            <a:schemeClr val="dk1"/>
+          </a:fontRef>
+        </p:style>
+        <p:txBody>
+          <a:bodyPr rtlCol="0" anchor="ctr"/>
+          <a:lstStyle/>
+          <a:p>
+            <a:pPr algn="ctr"/>
+            <a:r>
+              <a:rPr lang="en-US" sz="1200" b="1" noProof="1">
+                <a:latin typeface="Arial" panose="020B0604020202020204" pitchFamily="34" charset="0"/>
+                <a:cs typeface="Arial" panose="020B0604020202020204" pitchFamily="34" charset="0"/>
+              </a:rPr>
+              <a:t>SGD Classifier</a:t>
+            </a:r>
+            <a:endParaRPr lang="en-MY" sz="1100" dirty="0">
+              <a:latin typeface="Arial" panose="020B0604020202020204" pitchFamily="34" charset="0"/>
+              <a:cs typeface="Arial" panose="020B0604020202020204" pitchFamily="34" charset="0"/>
+            </a:endParaRPr>
+          </a:p>
+        </p:txBody>
+      </p:sp>
+      <p:sp>
+        <p:nvSpPr>
+          <p:cNvPr id="5" name="Rectangle 4">
+            <a:extLst>
+              <a:ext uri="{FF2B5EF4-FFF2-40B4-BE49-F238E27FC236}">
+                <a16:creationId xmlns:a16="http://schemas.microsoft.com/office/drawing/2014/main" id="{0F475E58-7F22-5D3A-1D6E-F3C07B4E01F8}"/>
+              </a:ext>
+            </a:extLst>
+          </p:cNvPr>
+          <p:cNvSpPr/>
+          <p:nvPr/>
+        </p:nvSpPr>
+        <p:spPr>
+          <a:xfrm>
+            <a:off x="6391620" y="2895206"/>
+            <a:ext cx="920400" cy="237596"/>
+          </a:xfrm>
+          <a:prstGeom prst="rect">
+            <a:avLst/>
+          </a:prstGeom>
+          <a:ln w="6350">
+            <a:solidFill>
+              <a:schemeClr val="tx1"/>
+            </a:solidFill>
+          </a:ln>
+        </p:spPr>
+        <p:style>
+          <a:lnRef idx="2">
+            <a:schemeClr val="accent6"/>
+          </a:lnRef>
+          <a:fillRef idx="1">
+            <a:schemeClr val="lt1"/>
+          </a:fillRef>
+          <a:effectRef idx="0">
+            <a:schemeClr val="accent6"/>
+          </a:effectRef>
+          <a:fontRef idx="minor">
+            <a:schemeClr val="dk1"/>
+          </a:fontRef>
+        </p:style>
+        <p:txBody>
+          <a:bodyPr rtlCol="0" anchor="ctr"/>
+          <a:lstStyle/>
+          <a:p>
+            <a:pPr algn="ctr"/>
+            <a:r>
+              <a:rPr lang="en-US" sz="1200" dirty="0">
+                <a:latin typeface="Arial" panose="020B0604020202020204" pitchFamily="34" charset="0"/>
+                <a:cs typeface="Arial" panose="020B0604020202020204" pitchFamily="34" charset="0"/>
+              </a:rPr>
+              <a:t>Data type</a:t>
+            </a:r>
+            <a:endParaRPr lang="en-MY" sz="1600" dirty="0">
+              <a:latin typeface="Arial" panose="020B0604020202020204" pitchFamily="34" charset="0"/>
+              <a:cs typeface="Arial" panose="020B0604020202020204" pitchFamily="34" charset="0"/>
+            </a:endParaRPr>
+          </a:p>
+        </p:txBody>
+      </p:sp>
+      <p:cxnSp>
+        <p:nvCxnSpPr>
+          <p:cNvPr id="6" name="Straight Arrow Connector 5">
+            <a:extLst>
+              <a:ext uri="{FF2B5EF4-FFF2-40B4-BE49-F238E27FC236}">
+                <a16:creationId xmlns:a16="http://schemas.microsoft.com/office/drawing/2014/main" id="{32D015BD-B6C2-F283-5F2B-E6FCBB61B90B}"/>
+              </a:ext>
+            </a:extLst>
+          </p:cNvPr>
+          <p:cNvCxnSpPr>
+            <a:cxnSpLocks/>
+            <a:stCxn id="2" idx="2"/>
+            <a:endCxn id="5" idx="0"/>
+          </p:cNvCxnSpPr>
+          <p:nvPr/>
+        </p:nvCxnSpPr>
+        <p:spPr>
+          <a:xfrm>
+            <a:off x="6848766" y="2619554"/>
+            <a:ext cx="3054" cy="275652"/>
+          </a:xfrm>
+          <a:prstGeom prst="straightConnector1">
+            <a:avLst/>
+          </a:prstGeom>
+          <a:ln>
+            <a:solidFill>
+              <a:schemeClr val="tx2"/>
+            </a:solidFill>
+            <a:tailEnd type="triangle"/>
+          </a:ln>
+        </p:spPr>
+        <p:style>
+          <a:lnRef idx="1">
+            <a:schemeClr val="accent1"/>
+          </a:lnRef>
+          <a:fillRef idx="0">
+            <a:schemeClr val="accent1"/>
+          </a:fillRef>
+          <a:effectRef idx="0">
+            <a:schemeClr val="accent1"/>
+          </a:effectRef>
+          <a:fontRef idx="minor">
+            <a:schemeClr val="tx1"/>
+          </a:fontRef>
+        </p:style>
+      </p:cxnSp>
+    </p:spTree>
+    <p:extLst>
+      <p:ext uri="{BB962C8B-B14F-4D97-AF65-F5344CB8AC3E}">
+        <p14:creationId xmlns:p14="http://schemas.microsoft.com/office/powerpoint/2010/main" val="1347960919"/>
+      </p:ext>
+    </p:extLst>
+  </p:cSld>
+  <p:clrMapOvr>
+    <a:masterClrMapping/>
+  </p:clrMapOvr>
+</p:sld>
+</file>
+
+<file path=ppt/slides/slide5.xml><?xml version="1.0" encoding="utf-8"?>
+<p:sld xmlns:a="http://schemas.openxmlformats.org/drawingml/2006/main" xmlns:r="http://schemas.openxmlformats.org/officeDocument/2006/relationships" xmlns:p="http://schemas.openxmlformats.org/presentationml/2006/main" showMasterSp="0">
+  <p:cSld>
+    <p:bg>
+      <p:bgPr>
+        <a:solidFill>
+          <a:schemeClr val="accent6">
+            <a:lumMod val="20000"/>
+            <a:lumOff val="80000"/>
+          </a:schemeClr>
+        </a:solidFill>
+        <a:effectLst/>
+      </p:bgPr>
+    </p:bg>
+    <p:spTree>
+      <p:nvGrpSpPr>
+        <p:cNvPr id="1" name="">
+          <a:extLst>
+            <a:ext uri="{FF2B5EF4-FFF2-40B4-BE49-F238E27FC236}">
+              <a16:creationId xmlns:a16="http://schemas.microsoft.com/office/drawing/2014/main" id="{223C77DE-B76F-4F1E-EDD9-CE0CD4B3F8F2}"/>
+            </a:ext>
+          </a:extLst>
+        </p:cNvPr>
+        <p:cNvGrpSpPr/>
+        <p:nvPr/>
+      </p:nvGrpSpPr>
+      <p:grpSpPr>
+        <a:xfrm>
+          <a:off x="0" y="0"/>
+          <a:ext cx="0" cy="0"/>
+          <a:chOff x="0" y="0"/>
+          <a:chExt cx="0" cy="0"/>
+        </a:xfrm>
+      </p:grpSpPr>
+      <p:pic>
+        <p:nvPicPr>
+          <p:cNvPr id="8" name="Picture 7">
+            <a:extLst>
+              <a:ext uri="{FF2B5EF4-FFF2-40B4-BE49-F238E27FC236}">
+                <a16:creationId xmlns:a16="http://schemas.microsoft.com/office/drawing/2014/main" id="{93994906-2372-B4D2-223B-D905720044A4}"/>
+              </a:ext>
+            </a:extLst>
+          </p:cNvPr>
+          <p:cNvPicPr>
+            <a:picLocks noChangeAspect="1"/>
+          </p:cNvPicPr>
+          <p:nvPr/>
+        </p:nvPicPr>
+        <p:blipFill>
+          <a:blip r:embed="rId3"/>
+          <a:srcRect r="38500"/>
+          <a:stretch>
+            <a:fillRect/>
+          </a:stretch>
+        </p:blipFill>
+        <p:spPr>
+          <a:xfrm>
+            <a:off x="2797917" y="1708493"/>
+            <a:ext cx="6596165" cy="3767163"/>
+          </a:xfrm>
+          <a:prstGeom prst="rect">
+            <a:avLst/>
+          </a:prstGeom>
+          <a:ln w="38100" cap="sq">
+            <a:solidFill>
+              <a:srgbClr val="000000"/>
+            </a:solidFill>
+            <a:prstDash val="solid"/>
+            <a:miter lim="800000"/>
+          </a:ln>
+          <a:effectLst>
+            <a:outerShdw blurRad="50800" dist="38100" dir="2700000" algn="tl" rotWithShape="0">
+              <a:srgbClr val="000000">
+                <a:alpha val="43000"/>
+              </a:srgbClr>
+            </a:outerShdw>
+          </a:effectLst>
+        </p:spPr>
+      </p:pic>
+      <p:sp>
+        <p:nvSpPr>
+          <p:cNvPr id="12" name="Rectangle 11">
+            <a:extLst>
+              <a:ext uri="{FF2B5EF4-FFF2-40B4-BE49-F238E27FC236}">
+                <a16:creationId xmlns:a16="http://schemas.microsoft.com/office/drawing/2014/main" id="{D524626C-3F36-D1AC-04D4-8AFF240984B3}"/>
+              </a:ext>
+            </a:extLst>
+          </p:cNvPr>
+          <p:cNvSpPr/>
+          <p:nvPr/>
+        </p:nvSpPr>
+        <p:spPr>
+          <a:xfrm>
+            <a:off x="2907498" y="730987"/>
+            <a:ext cx="6102683" cy="567461"/>
+          </a:xfrm>
+          <a:prstGeom prst="rect">
+            <a:avLst/>
+          </a:prstGeom>
+          <a:noFill/>
+          <a:ln>
+            <a:noFill/>
+          </a:ln>
+        </p:spPr>
+        <p:style>
+          <a:lnRef idx="2">
+            <a:schemeClr val="accent6"/>
+          </a:lnRef>
+          <a:fillRef idx="1">
+            <a:schemeClr val="lt1"/>
+          </a:fillRef>
+          <a:effectRef idx="0">
+            <a:schemeClr val="accent6"/>
+          </a:effectRef>
+          <a:fontRef idx="minor">
+            <a:schemeClr val="dk1"/>
+          </a:fontRef>
+        </p:style>
+        <p:txBody>
+          <a:bodyPr rtlCol="0" anchor="ctr"/>
+          <a:lstStyle/>
+          <a:p>
+            <a:pPr algn="ctr"/>
+            <a:r>
+              <a:rPr lang="en-MY" sz="4000" b="1" dirty="0"/>
+              <a:t>SQL : </a:t>
+            </a:r>
+            <a:r>
+              <a:rPr lang="en-MY" sz="4000" dirty="0"/>
+              <a:t>From DB to Json</a:t>
+            </a:r>
+            <a:endParaRPr lang="en-MY" sz="4000" b="1" dirty="0"/>
+          </a:p>
+        </p:txBody>
+      </p:sp>
+    </p:spTree>
+    <p:extLst>
+      <p:ext uri="{BB962C8B-B14F-4D97-AF65-F5344CB8AC3E}">
+        <p14:creationId xmlns:p14="http://schemas.microsoft.com/office/powerpoint/2010/main" val="344238845"/>
+      </p:ext>
+    </p:extLst>
+  </p:cSld>
+  <p:clrMapOvr>
+    <a:masterClrMapping/>
+  </p:clrMapOvr>
+</p:sld>
+</file>
+
+<file path=ppt/slides/slide6.xml><?xml version="1.0" encoding="utf-8"?>
+<p:sld xmlns:a="http://schemas.openxmlformats.org/drawingml/2006/main" xmlns:r="http://schemas.openxmlformats.org/officeDocument/2006/relationships" xmlns:p="http://schemas.openxmlformats.org/presentationml/2006/main" showMasterSp="0">
+  <p:cSld>
+    <p:bg>
+      <p:bgPr>
+        <a:solidFill>
+          <a:schemeClr val="accent6">
+            <a:lumMod val="20000"/>
+            <a:lumOff val="80000"/>
+          </a:schemeClr>
+        </a:solidFill>
+        <a:effectLst/>
+      </p:bgPr>
+    </p:bg>
+    <p:spTree>
+      <p:nvGrpSpPr>
+        <p:cNvPr id="1" name="">
+          <a:extLst>
+            <a:ext uri="{FF2B5EF4-FFF2-40B4-BE49-F238E27FC236}">
+              <a16:creationId xmlns:a16="http://schemas.microsoft.com/office/drawing/2014/main" id="{2A9C1AEF-691B-A95B-1F83-8D297EB62FF9}"/>
+            </a:ext>
+          </a:extLst>
+        </p:cNvPr>
+        <p:cNvGrpSpPr/>
+        <p:nvPr/>
+      </p:nvGrpSpPr>
+      <p:grpSpPr>
+        <a:xfrm>
+          <a:off x="0" y="0"/>
+          <a:ext cx="0" cy="0"/>
+          <a:chOff x="0" y="0"/>
+          <a:chExt cx="0" cy="0"/>
+        </a:xfrm>
+      </p:grpSpPr>
+    </p:spTree>
+    <p:extLst>
+      <p:ext uri="{BB962C8B-B14F-4D97-AF65-F5344CB8AC3E}">
+        <p14:creationId xmlns:p14="http://schemas.microsoft.com/office/powerpoint/2010/main" val="2060238273"/>
+      </p:ext>
+    </p:extLst>
+  </p:cSld>
+  <p:clrMapOvr>
+    <a:masterClrMapping/>
+  </p:clrMapOvr>
+</p:sld>
+</file>
+
+<file path=ppt/slides/slide7.xml><?xml version="1.0" encoding="utf-8"?>
+<p:sld xmlns:a="http://schemas.openxmlformats.org/drawingml/2006/main" xmlns:r="http://schemas.openxmlformats.org/officeDocument/2006/relationships" xmlns:p="http://schemas.openxmlformats.org/presentationml/2006/main" showMasterSp="0">
+  <p:cSld>
+    <p:bg>
+      <p:bgPr>
+        <a:solidFill>
           <a:srgbClr val="CDF6F9"/>
         </a:solidFill>
         <a:effectLst/>
@@ -10786,7 +13033,7 @@
 </p:sld>
 </file>
 
-<file path=ppt/slides/slide5.xml><?xml version="1.0" encoding="utf-8"?>
+<file path=ppt/slides/slide8.xml><?xml version="1.0" encoding="utf-8"?>
 <p:sld xmlns:a="http://schemas.openxmlformats.org/drawingml/2006/main" xmlns:r="http://schemas.openxmlformats.org/officeDocument/2006/relationships" xmlns:p="http://schemas.openxmlformats.org/presentationml/2006/main" showMasterSp="0">
   <p:cSld>
     <p:bg>
@@ -10901,7 +13148,7 @@
 </p:sld>
 </file>
 
-<file path=ppt/slides/slide6.xml><?xml version="1.0" encoding="utf-8"?>
+<file path=ppt/slides/slide9.xml><?xml version="1.0" encoding="utf-8"?>
 <p:sld xmlns:a="http://schemas.openxmlformats.org/drawingml/2006/main" xmlns:r="http://schemas.openxmlformats.org/officeDocument/2006/relationships" xmlns:p="http://schemas.openxmlformats.org/presentationml/2006/main">
   <p:cSld>
     <p:spTree>

--- a/1.training_model/supplementary/Device Identifier 20260520.pptx
+++ b/1.training_model/supplementary/Device Identifier 20260520.pptx
@@ -5,7 +5,7 @@
     <p:sldMasterId id="2147483696" r:id="rId1"/>
   </p:sldMasterIdLst>
   <p:notesMasterIdLst>
-    <p:notesMasterId r:id="rId11"/>
+    <p:notesMasterId r:id="rId12"/>
   </p:notesMasterIdLst>
   <p:sldIdLst>
     <p:sldId id="256" r:id="rId2"/>
@@ -14,9 +14,10 @@
     <p:sldId id="328" r:id="rId5"/>
     <p:sldId id="329" r:id="rId6"/>
     <p:sldId id="330" r:id="rId7"/>
-    <p:sldId id="323" r:id="rId8"/>
-    <p:sldId id="327" r:id="rId9"/>
-    <p:sldId id="326" r:id="rId10"/>
+    <p:sldId id="331" r:id="rId8"/>
+    <p:sldId id="323" r:id="rId9"/>
+    <p:sldId id="327" r:id="rId10"/>
+    <p:sldId id="326" r:id="rId11"/>
   </p:sldIdLst>
   <p:sldSz cx="12192000" cy="6858000"/>
   <p:notesSz cx="6858000" cy="9144000"/>
@@ -205,7 +206,7 @@
           <a:p>
             <a:fld id="{23D8B80A-F233-4240-BDAF-6537AE249829}" type="datetimeFigureOut">
               <a:rPr lang="en-MY" smtClean="0"/>
-              <a:t>15/6/2026</a:t>
+              <a:t>18/6/2026</a:t>
             </a:fld>
             <a:endParaRPr lang="en-MY"/>
           </a:p>
@@ -973,6 +974,114 @@
         <p:cNvPr id="1" name="">
           <a:extLst>
             <a:ext uri="{FF2B5EF4-FFF2-40B4-BE49-F238E27FC236}">
+              <a16:creationId xmlns:a16="http://schemas.microsoft.com/office/drawing/2014/main" id="{27AC51A4-DF0B-FDE9-7E77-505DF0963615}"/>
+            </a:ext>
+          </a:extLst>
+        </p:cNvPr>
+        <p:cNvGrpSpPr/>
+        <p:nvPr/>
+      </p:nvGrpSpPr>
+      <p:grpSpPr>
+        <a:xfrm>
+          <a:off x="0" y="0"/>
+          <a:ext cx="0" cy="0"/>
+          <a:chOff x="0" y="0"/>
+          <a:chExt cx="0" cy="0"/>
+        </a:xfrm>
+      </p:grpSpPr>
+      <p:sp>
+        <p:nvSpPr>
+          <p:cNvPr id="2" name="Slide Image Placeholder 1">
+            <a:extLst>
+              <a:ext uri="{FF2B5EF4-FFF2-40B4-BE49-F238E27FC236}">
+                <a16:creationId xmlns:a16="http://schemas.microsoft.com/office/drawing/2014/main" id="{689F12C7-7B82-5718-D799-1E0BDF7D0DC6}"/>
+              </a:ext>
+            </a:extLst>
+          </p:cNvPr>
+          <p:cNvSpPr>
+            <a:spLocks noGrp="1" noRot="1" noChangeAspect="1"/>
+          </p:cNvSpPr>
+          <p:nvPr>
+            <p:ph type="sldImg"/>
+          </p:nvPr>
+        </p:nvSpPr>
+        <p:spPr/>
+      </p:sp>
+      <p:sp>
+        <p:nvSpPr>
+          <p:cNvPr id="3" name="Notes Placeholder 2">
+            <a:extLst>
+              <a:ext uri="{FF2B5EF4-FFF2-40B4-BE49-F238E27FC236}">
+                <a16:creationId xmlns:a16="http://schemas.microsoft.com/office/drawing/2014/main" id="{51C14063-9072-7B10-13CD-D17185884897}"/>
+              </a:ext>
+            </a:extLst>
+          </p:cNvPr>
+          <p:cNvSpPr>
+            <a:spLocks noGrp="1"/>
+          </p:cNvSpPr>
+          <p:nvPr>
+            <p:ph type="body" idx="1"/>
+          </p:nvPr>
+        </p:nvSpPr>
+        <p:spPr/>
+        <p:txBody>
+          <a:bodyPr/>
+          <a:lstStyle/>
+          <a:p>
+            <a:endParaRPr lang="en-MY" dirty="0"/>
+          </a:p>
+        </p:txBody>
+      </p:sp>
+      <p:sp>
+        <p:nvSpPr>
+          <p:cNvPr id="4" name="Slide Number Placeholder 3">
+            <a:extLst>
+              <a:ext uri="{FF2B5EF4-FFF2-40B4-BE49-F238E27FC236}">
+                <a16:creationId xmlns:a16="http://schemas.microsoft.com/office/drawing/2014/main" id="{A9C3D2FF-9922-1F5C-63D9-3AD351D33DD4}"/>
+              </a:ext>
+            </a:extLst>
+          </p:cNvPr>
+          <p:cNvSpPr>
+            <a:spLocks noGrp="1"/>
+          </p:cNvSpPr>
+          <p:nvPr>
+            <p:ph type="sldNum" sz="quarter" idx="5"/>
+          </p:nvPr>
+        </p:nvSpPr>
+        <p:spPr/>
+        <p:txBody>
+          <a:bodyPr/>
+          <a:lstStyle/>
+          <a:p>
+            <a:fld id="{D16833E0-5E66-4D1D-89F5-BD860FDD8F71}" type="slidenum">
+              <a:rPr lang="en-MY" smtClean="0"/>
+              <a:t>7</a:t>
+            </a:fld>
+            <a:endParaRPr lang="en-MY"/>
+          </a:p>
+        </p:txBody>
+      </p:sp>
+    </p:spTree>
+    <p:extLst>
+      <p:ext uri="{BB962C8B-B14F-4D97-AF65-F5344CB8AC3E}">
+        <p14:creationId xmlns:p14="http://schemas.microsoft.com/office/powerpoint/2010/main" val="479054430"/>
+      </p:ext>
+    </p:extLst>
+  </p:cSld>
+  <p:clrMapOvr>
+    <a:masterClrMapping/>
+  </p:clrMapOvr>
+</p:notes>
+</file>
+
+<file path=ppt/notesSlides/notesSlide7.xml><?xml version="1.0" encoding="utf-8"?>
+<p:notes xmlns:a="http://schemas.openxmlformats.org/drawingml/2006/main" xmlns:r="http://schemas.openxmlformats.org/officeDocument/2006/relationships" xmlns:p="http://schemas.openxmlformats.org/presentationml/2006/main">
+  <p:cSld>
+    <p:spTree>
+      <p:nvGrpSpPr>
+        <p:cNvPr id="1" name="">
+          <a:extLst>
+            <a:ext uri="{FF2B5EF4-FFF2-40B4-BE49-F238E27FC236}">
               <a16:creationId xmlns:a16="http://schemas.microsoft.com/office/drawing/2014/main" id="{A183267B-B82B-1EDC-363F-2C9961D70AB9}"/>
             </a:ext>
           </a:extLst>
@@ -1054,7 +1163,7 @@
           <a:p>
             <a:fld id="{D16833E0-5E66-4D1D-89F5-BD860FDD8F71}" type="slidenum">
               <a:rPr lang="en-MY" smtClean="0"/>
-              <a:t>7</a:t>
+              <a:t>8</a:t>
             </a:fld>
             <a:endParaRPr lang="en-MY"/>
           </a:p>
@@ -1073,7 +1182,7 @@
 </p:notes>
 </file>
 
-<file path=ppt/notesSlides/notesSlide7.xml><?xml version="1.0" encoding="utf-8"?>
+<file path=ppt/notesSlides/notesSlide8.xml><?xml version="1.0" encoding="utf-8"?>
 <p:notes xmlns:a="http://schemas.openxmlformats.org/drawingml/2006/main" xmlns:r="http://schemas.openxmlformats.org/officeDocument/2006/relationships" xmlns:p="http://schemas.openxmlformats.org/presentationml/2006/main">
   <p:cSld>
     <p:spTree>
@@ -1162,7 +1271,7 @@
           <a:p>
             <a:fld id="{D16833E0-5E66-4D1D-89F5-BD860FDD8F71}" type="slidenum">
               <a:rPr lang="en-MY" smtClean="0"/>
-              <a:t>8</a:t>
+              <a:t>9</a:t>
             </a:fld>
             <a:endParaRPr lang="en-MY"/>
           </a:p>
@@ -1352,7 +1461,7 @@
           <a:p>
             <a:fld id="{1CD01395-AC05-405C-BAB9-E5D2B9FDBB40}" type="datetimeFigureOut">
               <a:rPr lang="en-MY" smtClean="0"/>
-              <a:t>15/6/2026</a:t>
+              <a:t>18/6/2026</a:t>
             </a:fld>
             <a:endParaRPr lang="en-MY"/>
           </a:p>
@@ -1667,7 +1776,7 @@
           <a:p>
             <a:fld id="{1CD01395-AC05-405C-BAB9-E5D2B9FDBB40}" type="datetimeFigureOut">
               <a:rPr lang="en-MY" smtClean="0"/>
-              <a:t>15/6/2026</a:t>
+              <a:t>18/6/2026</a:t>
             </a:fld>
             <a:endParaRPr lang="en-MY"/>
           </a:p>
@@ -1889,7 +1998,7 @@
           <a:p>
             <a:fld id="{1CD01395-AC05-405C-BAB9-E5D2B9FDBB40}" type="datetimeFigureOut">
               <a:rPr lang="en-MY" smtClean="0"/>
-              <a:t>15/6/2026</a:t>
+              <a:t>18/6/2026</a:t>
             </a:fld>
             <a:endParaRPr lang="en-MY"/>
           </a:p>
@@ -2180,7 +2289,7 @@
           <a:p>
             <a:fld id="{1CD01395-AC05-405C-BAB9-E5D2B9FDBB40}" type="datetimeFigureOut">
               <a:rPr lang="en-MY" smtClean="0"/>
-              <a:t>15/6/2026</a:t>
+              <a:t>18/6/2026</a:t>
             </a:fld>
             <a:endParaRPr lang="en-MY"/>
           </a:p>
@@ -2634,7 +2743,7 @@
           <a:p>
             <a:fld id="{1CD01395-AC05-405C-BAB9-E5D2B9FDBB40}" type="datetimeFigureOut">
               <a:rPr lang="en-MY" smtClean="0"/>
-              <a:t>15/6/2026</a:t>
+              <a:t>18/6/2026</a:t>
             </a:fld>
             <a:endParaRPr lang="en-MY"/>
           </a:p>
@@ -3210,7 +3319,7 @@
           <a:p>
             <a:fld id="{1CD01395-AC05-405C-BAB9-E5D2B9FDBB40}" type="datetimeFigureOut">
               <a:rPr lang="en-MY" smtClean="0"/>
-              <a:t>15/6/2026</a:t>
+              <a:t>18/6/2026</a:t>
             </a:fld>
             <a:endParaRPr lang="en-MY"/>
           </a:p>
@@ -4071,7 +4180,7 @@
           <a:p>
             <a:fld id="{1CD01395-AC05-405C-BAB9-E5D2B9FDBB40}" type="datetimeFigureOut">
               <a:rPr lang="en-MY" smtClean="0"/>
-              <a:t>15/6/2026</a:t>
+              <a:t>18/6/2026</a:t>
             </a:fld>
             <a:endParaRPr lang="en-MY"/>
           </a:p>
@@ -4276,7 +4385,7 @@
           <a:p>
             <a:fld id="{1CD01395-AC05-405C-BAB9-E5D2B9FDBB40}" type="datetimeFigureOut">
               <a:rPr lang="en-MY" smtClean="0"/>
-              <a:t>15/6/2026</a:t>
+              <a:t>18/6/2026</a:t>
             </a:fld>
             <a:endParaRPr lang="en-MY"/>
           </a:p>
@@ -4490,7 +4599,7 @@
           <a:p>
             <a:fld id="{1CD01395-AC05-405C-BAB9-E5D2B9FDBB40}" type="datetimeFigureOut">
               <a:rPr lang="en-MY" smtClean="0"/>
-              <a:t>15/6/2026</a:t>
+              <a:t>18/6/2026</a:t>
             </a:fld>
             <a:endParaRPr lang="en-MY"/>
           </a:p>
@@ -4695,7 +4804,7 @@
           <a:p>
             <a:fld id="{1CD01395-AC05-405C-BAB9-E5D2B9FDBB40}" type="datetimeFigureOut">
               <a:rPr lang="en-MY" smtClean="0"/>
-              <a:t>15/6/2026</a:t>
+              <a:t>18/6/2026</a:t>
             </a:fld>
             <a:endParaRPr lang="en-MY"/>
           </a:p>
@@ -4975,7 +5084,7 @@
           <a:p>
             <a:fld id="{1CD01395-AC05-405C-BAB9-E5D2B9FDBB40}" type="datetimeFigureOut">
               <a:rPr lang="en-MY" smtClean="0"/>
-              <a:t>15/6/2026</a:t>
+              <a:t>18/6/2026</a:t>
             </a:fld>
             <a:endParaRPr lang="en-MY"/>
           </a:p>
@@ -5242,7 +5351,7 @@
           <a:p>
             <a:fld id="{1CD01395-AC05-405C-BAB9-E5D2B9FDBB40}" type="datetimeFigureOut">
               <a:rPr lang="en-MY" smtClean="0"/>
-              <a:t>15/6/2026</a:t>
+              <a:t>18/6/2026</a:t>
             </a:fld>
             <a:endParaRPr lang="en-MY"/>
           </a:p>
@@ -5657,7 +5766,7 @@
           <a:p>
             <a:fld id="{1CD01395-AC05-405C-BAB9-E5D2B9FDBB40}" type="datetimeFigureOut">
               <a:rPr lang="en-MY" smtClean="0"/>
-              <a:t>15/6/2026</a:t>
+              <a:t>18/6/2026</a:t>
             </a:fld>
             <a:endParaRPr lang="en-MY"/>
           </a:p>
@@ -5805,7 +5914,7 @@
           <a:p>
             <a:fld id="{1CD01395-AC05-405C-BAB9-E5D2B9FDBB40}" type="datetimeFigureOut">
               <a:rPr lang="en-MY" smtClean="0"/>
-              <a:t>15/6/2026</a:t>
+              <a:t>18/6/2026</a:t>
             </a:fld>
             <a:endParaRPr lang="en-MY"/>
           </a:p>
@@ -5930,7 +6039,7 @@
           <a:p>
             <a:fld id="{1CD01395-AC05-405C-BAB9-E5D2B9FDBB40}" type="datetimeFigureOut">
               <a:rPr lang="en-MY" smtClean="0"/>
-              <a:t>15/6/2026</a:t>
+              <a:t>18/6/2026</a:t>
             </a:fld>
             <a:endParaRPr lang="en-MY"/>
           </a:p>
@@ -6209,7 +6318,7 @@
           <a:p>
             <a:fld id="{1CD01395-AC05-405C-BAB9-E5D2B9FDBB40}" type="datetimeFigureOut">
               <a:rPr lang="en-MY" smtClean="0"/>
-              <a:t>15/6/2026</a:t>
+              <a:t>18/6/2026</a:t>
             </a:fld>
             <a:endParaRPr lang="en-MY"/>
           </a:p>
@@ -6524,7 +6633,7 @@
           <a:p>
             <a:fld id="{1CD01395-AC05-405C-BAB9-E5D2B9FDBB40}" type="datetimeFigureOut">
               <a:rPr lang="en-MY" smtClean="0"/>
-              <a:t>15/6/2026</a:t>
+              <a:t>18/6/2026</a:t>
             </a:fld>
             <a:endParaRPr lang="en-MY"/>
           </a:p>
@@ -6777,7 +6886,7 @@
           <a:p>
             <a:fld id="{1CD01395-AC05-405C-BAB9-E5D2B9FDBB40}" type="datetimeFigureOut">
               <a:rPr lang="en-MY" smtClean="0"/>
-              <a:t>15/6/2026</a:t>
+              <a:t>18/6/2026</a:t>
             </a:fld>
             <a:endParaRPr lang="en-MY"/>
           </a:p>
@@ -7298,6 +7407,86 @@
 </p:sld>
 </file>
 
+<file path=ppt/slides/slide10.xml><?xml version="1.0" encoding="utf-8"?>
+<p:sld xmlns:a="http://schemas.openxmlformats.org/drawingml/2006/main" xmlns:r="http://schemas.openxmlformats.org/officeDocument/2006/relationships" xmlns:p="http://schemas.openxmlformats.org/presentationml/2006/main">
+  <p:cSld>
+    <p:spTree>
+      <p:nvGrpSpPr>
+        <p:cNvPr id="1" name=""/>
+        <p:cNvGrpSpPr/>
+        <p:nvPr/>
+      </p:nvGrpSpPr>
+      <p:grpSpPr>
+        <a:xfrm>
+          <a:off x="0" y="0"/>
+          <a:ext cx="0" cy="0"/>
+          <a:chOff x="0" y="0"/>
+          <a:chExt cx="0" cy="0"/>
+        </a:xfrm>
+      </p:grpSpPr>
+      <p:sp>
+        <p:nvSpPr>
+          <p:cNvPr id="2" name="Title 1">
+            <a:extLst>
+              <a:ext uri="{FF2B5EF4-FFF2-40B4-BE49-F238E27FC236}">
+                <a16:creationId xmlns:a16="http://schemas.microsoft.com/office/drawing/2014/main" id="{887D954D-6BAB-E5BB-EDE6-E99E9E8B7146}"/>
+              </a:ext>
+            </a:extLst>
+          </p:cNvPr>
+          <p:cNvSpPr>
+            <a:spLocks noGrp="1"/>
+          </p:cNvSpPr>
+          <p:nvPr>
+            <p:ph type="title"/>
+          </p:nvPr>
+        </p:nvSpPr>
+        <p:spPr/>
+        <p:txBody>
+          <a:bodyPr/>
+          <a:lstStyle/>
+          <a:p>
+            <a:endParaRPr lang="en-MY"/>
+          </a:p>
+        </p:txBody>
+      </p:sp>
+      <p:sp>
+        <p:nvSpPr>
+          <p:cNvPr id="3" name="Content Placeholder 2">
+            <a:extLst>
+              <a:ext uri="{FF2B5EF4-FFF2-40B4-BE49-F238E27FC236}">
+                <a16:creationId xmlns:a16="http://schemas.microsoft.com/office/drawing/2014/main" id="{E3051F36-2B91-1D55-6FDC-91FFF40B05A1}"/>
+              </a:ext>
+            </a:extLst>
+          </p:cNvPr>
+          <p:cNvSpPr>
+            <a:spLocks noGrp="1"/>
+          </p:cNvSpPr>
+          <p:nvPr>
+            <p:ph sz="quarter" idx="13"/>
+          </p:nvPr>
+        </p:nvSpPr>
+        <p:spPr/>
+        <p:txBody>
+          <a:bodyPr/>
+          <a:lstStyle/>
+          <a:p>
+            <a:endParaRPr lang="en-MY"/>
+          </a:p>
+        </p:txBody>
+      </p:sp>
+    </p:spTree>
+    <p:extLst>
+      <p:ext uri="{BB962C8B-B14F-4D97-AF65-F5344CB8AC3E}">
+        <p14:creationId xmlns:p14="http://schemas.microsoft.com/office/powerpoint/2010/main" val="1573312710"/>
+      </p:ext>
+    </p:extLst>
+  </p:cSld>
+  <p:clrMapOvr>
+    <a:masterClrMapping/>
+  </p:clrMapOvr>
+</p:sld>
+</file>
+
 <file path=ppt/slides/slide2.xml><?xml version="1.0" encoding="utf-8"?>
 <p:sld xmlns:a="http://schemas.openxmlformats.org/drawingml/2006/main" xmlns:r="http://schemas.openxmlformats.org/officeDocument/2006/relationships" xmlns:p="http://schemas.openxmlformats.org/presentationml/2006/main" showMasterSp="0">
   <p:cSld>
@@ -12760,8 +12949,8 @@
         </p:blipFill>
         <p:spPr>
           <a:xfrm>
-            <a:off x="2797917" y="1708493"/>
-            <a:ext cx="6596165" cy="3767163"/>
+            <a:off x="219309" y="2178819"/>
+            <a:ext cx="6172347" cy="3525115"/>
           </a:xfrm>
           <a:prstGeom prst="rect">
             <a:avLst/>
@@ -12796,7 +12985,7 @@
         </p:nvSpPr>
         <p:spPr>
           <a:xfrm>
-            <a:off x="2907498" y="730987"/>
+            <a:off x="3209250" y="292075"/>
             <a:ext cx="6102683" cy="567461"/>
           </a:xfrm>
           <a:prstGeom prst="rect">
@@ -12835,6 +13024,96 @@
               <a:t>From DB to Json</a:t>
             </a:r>
             <a:endParaRPr lang="en-MY" sz="4000" b="1" dirty="0"/>
+          </a:p>
+        </p:txBody>
+      </p:sp>
+      <p:pic>
+        <p:nvPicPr>
+          <p:cNvPr id="3" name="Picture 2">
+            <a:extLst>
+              <a:ext uri="{FF2B5EF4-FFF2-40B4-BE49-F238E27FC236}">
+                <a16:creationId xmlns:a16="http://schemas.microsoft.com/office/drawing/2014/main" id="{E7F26C49-B91E-5061-F81B-CB6DD35A7400}"/>
+              </a:ext>
+            </a:extLst>
+          </p:cNvPr>
+          <p:cNvPicPr>
+            <a:picLocks noChangeAspect="1"/>
+          </p:cNvPicPr>
+          <p:nvPr/>
+        </p:nvPicPr>
+        <p:blipFill>
+          <a:blip r:embed="rId4"/>
+          <a:srcRect r="29937"/>
+          <a:stretch>
+            <a:fillRect/>
+          </a:stretch>
+        </p:blipFill>
+        <p:spPr>
+          <a:xfrm>
+            <a:off x="8749895" y="1688399"/>
+            <a:ext cx="2542945" cy="4505954"/>
+          </a:xfrm>
+          <a:prstGeom prst="rect">
+            <a:avLst/>
+          </a:prstGeom>
+          <a:ln w="127000" cap="sq">
+            <a:solidFill>
+              <a:srgbClr val="000000"/>
+            </a:solidFill>
+            <a:miter lim="800000"/>
+          </a:ln>
+          <a:effectLst>
+            <a:outerShdw blurRad="57150" dist="50800" dir="2700000" algn="tl" rotWithShape="0">
+              <a:srgbClr val="000000">
+                <a:alpha val="40000"/>
+              </a:srgbClr>
+            </a:outerShdw>
+          </a:effectLst>
+        </p:spPr>
+      </p:pic>
+      <p:sp>
+        <p:nvSpPr>
+          <p:cNvPr id="4" name="Arrow: Right 3">
+            <a:extLst>
+              <a:ext uri="{FF2B5EF4-FFF2-40B4-BE49-F238E27FC236}">
+                <a16:creationId xmlns:a16="http://schemas.microsoft.com/office/drawing/2014/main" id="{CC88C422-744D-5DCF-988F-D10AD46473D5}"/>
+              </a:ext>
+            </a:extLst>
+          </p:cNvPr>
+          <p:cNvSpPr/>
+          <p:nvPr/>
+        </p:nvSpPr>
+        <p:spPr>
+          <a:xfrm>
+            <a:off x="6903720" y="3346704"/>
+            <a:ext cx="1325880" cy="731520"/>
+          </a:xfrm>
+          <a:prstGeom prst="rightArrow">
+            <a:avLst/>
+          </a:prstGeom>
+        </p:spPr>
+        <p:style>
+          <a:lnRef idx="2">
+            <a:schemeClr val="accent1">
+              <a:shade val="15000"/>
+            </a:schemeClr>
+          </a:lnRef>
+          <a:fillRef idx="1">
+            <a:schemeClr val="accent1"/>
+          </a:fillRef>
+          <a:effectRef idx="0">
+            <a:schemeClr val="accent1"/>
+          </a:effectRef>
+          <a:fontRef idx="minor">
+            <a:schemeClr val="lt1"/>
+          </a:fontRef>
+        </p:style>
+        <p:txBody>
+          <a:bodyPr rtlCol="0" anchor="ctr"/>
+          <a:lstStyle/>
+          <a:p>
+            <a:pPr algn="ctr"/>
+            <a:endParaRPr lang="en-MY"/>
           </a:p>
         </p:txBody>
       </p:sp>
@@ -12885,6 +13164,49 @@
           <a:chExt cx="0" cy="0"/>
         </a:xfrm>
       </p:grpSpPr>
+      <p:pic>
+        <p:nvPicPr>
+          <p:cNvPr id="3" name="Picture 2">
+            <a:extLst>
+              <a:ext uri="{FF2B5EF4-FFF2-40B4-BE49-F238E27FC236}">
+                <a16:creationId xmlns:a16="http://schemas.microsoft.com/office/drawing/2014/main" id="{D9B802F5-DEEB-EEB0-FF97-A42EB4EB2FBB}"/>
+              </a:ext>
+            </a:extLst>
+          </p:cNvPr>
+          <p:cNvPicPr>
+            <a:picLocks noChangeAspect="1"/>
+          </p:cNvPicPr>
+          <p:nvPr/>
+        </p:nvPicPr>
+        <p:blipFill>
+          <a:blip r:embed="rId3"/>
+          <a:stretch>
+            <a:fillRect/>
+          </a:stretch>
+        </p:blipFill>
+        <p:spPr>
+          <a:xfrm>
+            <a:off x="574138" y="954783"/>
+            <a:ext cx="5868219" cy="2772162"/>
+          </a:xfrm>
+          <a:prstGeom prst="rect">
+            <a:avLst/>
+          </a:prstGeom>
+          <a:ln w="127000" cap="sq">
+            <a:solidFill>
+              <a:srgbClr val="000000"/>
+            </a:solidFill>
+            <a:miter lim="800000"/>
+          </a:ln>
+          <a:effectLst>
+            <a:outerShdw blurRad="57150" dist="50800" dir="2700000" algn="tl" rotWithShape="0">
+              <a:srgbClr val="000000">
+                <a:alpha val="40000"/>
+              </a:srgbClr>
+            </a:outerShdw>
+          </a:effectLst>
+        </p:spPr>
+      </p:pic>
     </p:spTree>
     <p:extLst>
       <p:ext uri="{BB962C8B-B14F-4D97-AF65-F5344CB8AC3E}">
@@ -12899,6 +13221,90 @@
 </file>
 
 <file path=ppt/slides/slide7.xml><?xml version="1.0" encoding="utf-8"?>
+<p:sld xmlns:a="http://schemas.openxmlformats.org/drawingml/2006/main" xmlns:r="http://schemas.openxmlformats.org/officeDocument/2006/relationships" xmlns:p="http://schemas.openxmlformats.org/presentationml/2006/main" showMasterSp="0">
+  <p:cSld>
+    <p:bg>
+      <p:bgPr>
+        <a:solidFill>
+          <a:schemeClr val="accent6">
+            <a:lumMod val="20000"/>
+            <a:lumOff val="80000"/>
+          </a:schemeClr>
+        </a:solidFill>
+        <a:effectLst/>
+      </p:bgPr>
+    </p:bg>
+    <p:spTree>
+      <p:nvGrpSpPr>
+        <p:cNvPr id="1" name="">
+          <a:extLst>
+            <a:ext uri="{FF2B5EF4-FFF2-40B4-BE49-F238E27FC236}">
+              <a16:creationId xmlns:a16="http://schemas.microsoft.com/office/drawing/2014/main" id="{BF222BB4-E5E8-E925-90A0-2C3082D2E871}"/>
+            </a:ext>
+          </a:extLst>
+        </p:cNvPr>
+        <p:cNvGrpSpPr/>
+        <p:nvPr/>
+      </p:nvGrpSpPr>
+      <p:grpSpPr>
+        <a:xfrm>
+          <a:off x="0" y="0"/>
+          <a:ext cx="0" cy="0"/>
+          <a:chOff x="0" y="0"/>
+          <a:chExt cx="0" cy="0"/>
+        </a:xfrm>
+      </p:grpSpPr>
+      <p:pic>
+        <p:nvPicPr>
+          <p:cNvPr id="6" name="Picture 5">
+            <a:extLst>
+              <a:ext uri="{FF2B5EF4-FFF2-40B4-BE49-F238E27FC236}">
+                <a16:creationId xmlns:a16="http://schemas.microsoft.com/office/drawing/2014/main" id="{A07C17FA-B6A8-B16D-4963-8E376401C32F}"/>
+              </a:ext>
+            </a:extLst>
+          </p:cNvPr>
+          <p:cNvPicPr>
+            <a:picLocks noChangeAspect="1"/>
+          </p:cNvPicPr>
+          <p:nvPr/>
+        </p:nvPicPr>
+        <p:blipFill>
+          <a:blip r:embed="rId3">
+            <a:extLst>
+              <a:ext uri="{28A0092B-C50C-407E-A947-70E740481C1C}">
+                <a14:useLocalDpi xmlns:a14="http://schemas.microsoft.com/office/drawing/2010/main" val="0"/>
+              </a:ext>
+            </a:extLst>
+          </a:blip>
+          <a:srcRect l="17625" t="537" r="17350" b="-537"/>
+          <a:stretch>
+            <a:fillRect/>
+          </a:stretch>
+        </p:blipFill>
+        <p:spPr>
+          <a:xfrm>
+            <a:off x="2990088" y="703237"/>
+            <a:ext cx="5577840" cy="4787717"/>
+          </a:xfrm>
+          <a:prstGeom prst="rect">
+            <a:avLst/>
+          </a:prstGeom>
+        </p:spPr>
+      </p:pic>
+    </p:spTree>
+    <p:extLst>
+      <p:ext uri="{BB962C8B-B14F-4D97-AF65-F5344CB8AC3E}">
+        <p14:creationId xmlns:p14="http://schemas.microsoft.com/office/powerpoint/2010/main" val="1157750540"/>
+      </p:ext>
+    </p:extLst>
+  </p:cSld>
+  <p:clrMapOvr>
+    <a:masterClrMapping/>
+  </p:clrMapOvr>
+</p:sld>
+</file>
+
+<file path=ppt/slides/slide8.xml><?xml version="1.0" encoding="utf-8"?>
 <p:sld xmlns:a="http://schemas.openxmlformats.org/drawingml/2006/main" xmlns:r="http://schemas.openxmlformats.org/officeDocument/2006/relationships" xmlns:p="http://schemas.openxmlformats.org/presentationml/2006/main" showMasterSp="0">
   <p:cSld>
     <p:bg>
@@ -13033,7 +13439,7 @@
 </p:sld>
 </file>
 
-<file path=ppt/slides/slide8.xml><?xml version="1.0" encoding="utf-8"?>
+<file path=ppt/slides/slide9.xml><?xml version="1.0" encoding="utf-8"?>
 <p:sld xmlns:a="http://schemas.openxmlformats.org/drawingml/2006/main" xmlns:r="http://schemas.openxmlformats.org/officeDocument/2006/relationships" xmlns:p="http://schemas.openxmlformats.org/presentationml/2006/main" showMasterSp="0">
   <p:cSld>
     <p:bg>
@@ -13139,86 +13545,6 @@
     <p:extLst>
       <p:ext uri="{BB962C8B-B14F-4D97-AF65-F5344CB8AC3E}">
         <p14:creationId xmlns:p14="http://schemas.microsoft.com/office/powerpoint/2010/main" val="975718132"/>
-      </p:ext>
-    </p:extLst>
-  </p:cSld>
-  <p:clrMapOvr>
-    <a:masterClrMapping/>
-  </p:clrMapOvr>
-</p:sld>
-</file>
-
-<file path=ppt/slides/slide9.xml><?xml version="1.0" encoding="utf-8"?>
-<p:sld xmlns:a="http://schemas.openxmlformats.org/drawingml/2006/main" xmlns:r="http://schemas.openxmlformats.org/officeDocument/2006/relationships" xmlns:p="http://schemas.openxmlformats.org/presentationml/2006/main">
-  <p:cSld>
-    <p:spTree>
-      <p:nvGrpSpPr>
-        <p:cNvPr id="1" name=""/>
-        <p:cNvGrpSpPr/>
-        <p:nvPr/>
-      </p:nvGrpSpPr>
-      <p:grpSpPr>
-        <a:xfrm>
-          <a:off x="0" y="0"/>
-          <a:ext cx="0" cy="0"/>
-          <a:chOff x="0" y="0"/>
-          <a:chExt cx="0" cy="0"/>
-        </a:xfrm>
-      </p:grpSpPr>
-      <p:sp>
-        <p:nvSpPr>
-          <p:cNvPr id="2" name="Title 1">
-            <a:extLst>
-              <a:ext uri="{FF2B5EF4-FFF2-40B4-BE49-F238E27FC236}">
-                <a16:creationId xmlns:a16="http://schemas.microsoft.com/office/drawing/2014/main" id="{887D954D-6BAB-E5BB-EDE6-E99E9E8B7146}"/>
-              </a:ext>
-            </a:extLst>
-          </p:cNvPr>
-          <p:cNvSpPr>
-            <a:spLocks noGrp="1"/>
-          </p:cNvSpPr>
-          <p:nvPr>
-            <p:ph type="title"/>
-          </p:nvPr>
-        </p:nvSpPr>
-        <p:spPr/>
-        <p:txBody>
-          <a:bodyPr/>
-          <a:lstStyle/>
-          <a:p>
-            <a:endParaRPr lang="en-MY"/>
-          </a:p>
-        </p:txBody>
-      </p:sp>
-      <p:sp>
-        <p:nvSpPr>
-          <p:cNvPr id="3" name="Content Placeholder 2">
-            <a:extLst>
-              <a:ext uri="{FF2B5EF4-FFF2-40B4-BE49-F238E27FC236}">
-                <a16:creationId xmlns:a16="http://schemas.microsoft.com/office/drawing/2014/main" id="{E3051F36-2B91-1D55-6FDC-91FFF40B05A1}"/>
-              </a:ext>
-            </a:extLst>
-          </p:cNvPr>
-          <p:cNvSpPr>
-            <a:spLocks noGrp="1"/>
-          </p:cNvSpPr>
-          <p:nvPr>
-            <p:ph sz="quarter" idx="13"/>
-          </p:nvPr>
-        </p:nvSpPr>
-        <p:spPr/>
-        <p:txBody>
-          <a:bodyPr/>
-          <a:lstStyle/>
-          <a:p>
-            <a:endParaRPr lang="en-MY"/>
-          </a:p>
-        </p:txBody>
-      </p:sp>
-    </p:spTree>
-    <p:extLst>
-      <p:ext uri="{BB962C8B-B14F-4D97-AF65-F5344CB8AC3E}">
-        <p14:creationId xmlns:p14="http://schemas.microsoft.com/office/powerpoint/2010/main" val="1573312710"/>
       </p:ext>
     </p:extLst>
   </p:cSld>

--- a/1.training_model/supplementary/Device Identifier 20260520.pptx
+++ b/1.training_model/supplementary/Device Identifier 20260520.pptx
@@ -5,7 +5,7 @@
     <p:sldMasterId id="2147483696" r:id="rId1"/>
   </p:sldMasterIdLst>
   <p:notesMasterIdLst>
-    <p:notesMasterId r:id="rId12"/>
+    <p:notesMasterId r:id="rId13"/>
   </p:notesMasterIdLst>
   <p:sldIdLst>
     <p:sldId id="256" r:id="rId2"/>
@@ -17,7 +17,8 @@
     <p:sldId id="331" r:id="rId8"/>
     <p:sldId id="323" r:id="rId9"/>
     <p:sldId id="327" r:id="rId10"/>
-    <p:sldId id="326" r:id="rId11"/>
+    <p:sldId id="332" r:id="rId11"/>
+    <p:sldId id="326" r:id="rId12"/>
   </p:sldIdLst>
   <p:sldSz cx="12192000" cy="6858000"/>
   <p:notesSz cx="6858000" cy="9144000"/>
@@ -206,7 +207,7 @@
           <a:p>
             <a:fld id="{23D8B80A-F233-4240-BDAF-6537AE249829}" type="datetimeFigureOut">
               <a:rPr lang="en-MY" smtClean="0"/>
-              <a:t>18/6/2026</a:t>
+              <a:t>19/6/2026</a:t>
             </a:fld>
             <a:endParaRPr lang="en-MY"/>
           </a:p>
@@ -1290,6 +1291,114 @@
 </p:notes>
 </file>
 
+<file path=ppt/notesSlides/notesSlide9.xml><?xml version="1.0" encoding="utf-8"?>
+<p:notes xmlns:a="http://schemas.openxmlformats.org/drawingml/2006/main" xmlns:r="http://schemas.openxmlformats.org/officeDocument/2006/relationships" xmlns:p="http://schemas.openxmlformats.org/presentationml/2006/main">
+  <p:cSld>
+    <p:spTree>
+      <p:nvGrpSpPr>
+        <p:cNvPr id="1" name="">
+          <a:extLst>
+            <a:ext uri="{FF2B5EF4-FFF2-40B4-BE49-F238E27FC236}">
+              <a16:creationId xmlns:a16="http://schemas.microsoft.com/office/drawing/2014/main" id="{AA54A910-8722-BE0D-ECC6-AE331ECADDCC}"/>
+            </a:ext>
+          </a:extLst>
+        </p:cNvPr>
+        <p:cNvGrpSpPr/>
+        <p:nvPr/>
+      </p:nvGrpSpPr>
+      <p:grpSpPr>
+        <a:xfrm>
+          <a:off x="0" y="0"/>
+          <a:ext cx="0" cy="0"/>
+          <a:chOff x="0" y="0"/>
+          <a:chExt cx="0" cy="0"/>
+        </a:xfrm>
+      </p:grpSpPr>
+      <p:sp>
+        <p:nvSpPr>
+          <p:cNvPr id="2" name="Slide Image Placeholder 1">
+            <a:extLst>
+              <a:ext uri="{FF2B5EF4-FFF2-40B4-BE49-F238E27FC236}">
+                <a16:creationId xmlns:a16="http://schemas.microsoft.com/office/drawing/2014/main" id="{C9FF1B51-0D4E-F4D9-C462-F4905C8AAF9C}"/>
+              </a:ext>
+            </a:extLst>
+          </p:cNvPr>
+          <p:cNvSpPr>
+            <a:spLocks noGrp="1" noRot="1" noChangeAspect="1"/>
+          </p:cNvSpPr>
+          <p:nvPr>
+            <p:ph type="sldImg"/>
+          </p:nvPr>
+        </p:nvSpPr>
+        <p:spPr/>
+      </p:sp>
+      <p:sp>
+        <p:nvSpPr>
+          <p:cNvPr id="3" name="Notes Placeholder 2">
+            <a:extLst>
+              <a:ext uri="{FF2B5EF4-FFF2-40B4-BE49-F238E27FC236}">
+                <a16:creationId xmlns:a16="http://schemas.microsoft.com/office/drawing/2014/main" id="{C41BCF9F-3AF4-EF24-64C9-01366B660CC8}"/>
+              </a:ext>
+            </a:extLst>
+          </p:cNvPr>
+          <p:cNvSpPr>
+            <a:spLocks noGrp="1"/>
+          </p:cNvSpPr>
+          <p:nvPr>
+            <p:ph type="body" idx="1"/>
+          </p:nvPr>
+        </p:nvSpPr>
+        <p:spPr/>
+        <p:txBody>
+          <a:bodyPr/>
+          <a:lstStyle/>
+          <a:p>
+            <a:endParaRPr lang="en-MY" dirty="0"/>
+          </a:p>
+        </p:txBody>
+      </p:sp>
+      <p:sp>
+        <p:nvSpPr>
+          <p:cNvPr id="4" name="Slide Number Placeholder 3">
+            <a:extLst>
+              <a:ext uri="{FF2B5EF4-FFF2-40B4-BE49-F238E27FC236}">
+                <a16:creationId xmlns:a16="http://schemas.microsoft.com/office/drawing/2014/main" id="{7A6CF6CA-73F6-4CE7-341F-2286B37A0478}"/>
+              </a:ext>
+            </a:extLst>
+          </p:cNvPr>
+          <p:cNvSpPr>
+            <a:spLocks noGrp="1"/>
+          </p:cNvSpPr>
+          <p:nvPr>
+            <p:ph type="sldNum" sz="quarter" idx="5"/>
+          </p:nvPr>
+        </p:nvSpPr>
+        <p:spPr/>
+        <p:txBody>
+          <a:bodyPr/>
+          <a:lstStyle/>
+          <a:p>
+            <a:fld id="{D16833E0-5E66-4D1D-89F5-BD860FDD8F71}" type="slidenum">
+              <a:rPr lang="en-MY" smtClean="0"/>
+              <a:t>10</a:t>
+            </a:fld>
+            <a:endParaRPr lang="en-MY"/>
+          </a:p>
+        </p:txBody>
+      </p:sp>
+    </p:spTree>
+    <p:extLst>
+      <p:ext uri="{BB962C8B-B14F-4D97-AF65-F5344CB8AC3E}">
+        <p14:creationId xmlns:p14="http://schemas.microsoft.com/office/powerpoint/2010/main" val="4002248972"/>
+      </p:ext>
+    </p:extLst>
+  </p:cSld>
+  <p:clrMapOvr>
+    <a:masterClrMapping/>
+  </p:clrMapOvr>
+</p:notes>
+</file>
+
 <file path=ppt/slideLayouts/slideLayout1.xml><?xml version="1.0" encoding="utf-8"?>
 <p:sldLayout xmlns:a="http://schemas.openxmlformats.org/drawingml/2006/main" xmlns:r="http://schemas.openxmlformats.org/officeDocument/2006/relationships" xmlns:p="http://schemas.openxmlformats.org/presentationml/2006/main" type="title" preserve="1">
   <p:cSld name="Title Slide">
@@ -1461,7 +1570,7 @@
           <a:p>
             <a:fld id="{1CD01395-AC05-405C-BAB9-E5D2B9FDBB40}" type="datetimeFigureOut">
               <a:rPr lang="en-MY" smtClean="0"/>
-              <a:t>18/6/2026</a:t>
+              <a:t>19/6/2026</a:t>
             </a:fld>
             <a:endParaRPr lang="en-MY"/>
           </a:p>
@@ -1776,7 +1885,7 @@
           <a:p>
             <a:fld id="{1CD01395-AC05-405C-BAB9-E5D2B9FDBB40}" type="datetimeFigureOut">
               <a:rPr lang="en-MY" smtClean="0"/>
-              <a:t>18/6/2026</a:t>
+              <a:t>19/6/2026</a:t>
             </a:fld>
             <a:endParaRPr lang="en-MY"/>
           </a:p>
@@ -1998,7 +2107,7 @@
           <a:p>
             <a:fld id="{1CD01395-AC05-405C-BAB9-E5D2B9FDBB40}" type="datetimeFigureOut">
               <a:rPr lang="en-MY" smtClean="0"/>
-              <a:t>18/6/2026</a:t>
+              <a:t>19/6/2026</a:t>
             </a:fld>
             <a:endParaRPr lang="en-MY"/>
           </a:p>
@@ -2289,7 +2398,7 @@
           <a:p>
             <a:fld id="{1CD01395-AC05-405C-BAB9-E5D2B9FDBB40}" type="datetimeFigureOut">
               <a:rPr lang="en-MY" smtClean="0"/>
-              <a:t>18/6/2026</a:t>
+              <a:t>19/6/2026</a:t>
             </a:fld>
             <a:endParaRPr lang="en-MY"/>
           </a:p>
@@ -2743,7 +2852,7 @@
           <a:p>
             <a:fld id="{1CD01395-AC05-405C-BAB9-E5D2B9FDBB40}" type="datetimeFigureOut">
               <a:rPr lang="en-MY" smtClean="0"/>
-              <a:t>18/6/2026</a:t>
+              <a:t>19/6/2026</a:t>
             </a:fld>
             <a:endParaRPr lang="en-MY"/>
           </a:p>
@@ -3319,7 +3428,7 @@
           <a:p>
             <a:fld id="{1CD01395-AC05-405C-BAB9-E5D2B9FDBB40}" type="datetimeFigureOut">
               <a:rPr lang="en-MY" smtClean="0"/>
-              <a:t>18/6/2026</a:t>
+              <a:t>19/6/2026</a:t>
             </a:fld>
             <a:endParaRPr lang="en-MY"/>
           </a:p>
@@ -4180,7 +4289,7 @@
           <a:p>
             <a:fld id="{1CD01395-AC05-405C-BAB9-E5D2B9FDBB40}" type="datetimeFigureOut">
               <a:rPr lang="en-MY" smtClean="0"/>
-              <a:t>18/6/2026</a:t>
+              <a:t>19/6/2026</a:t>
             </a:fld>
             <a:endParaRPr lang="en-MY"/>
           </a:p>
@@ -4385,7 +4494,7 @@
           <a:p>
             <a:fld id="{1CD01395-AC05-405C-BAB9-E5D2B9FDBB40}" type="datetimeFigureOut">
               <a:rPr lang="en-MY" smtClean="0"/>
-              <a:t>18/6/2026</a:t>
+              <a:t>19/6/2026</a:t>
             </a:fld>
             <a:endParaRPr lang="en-MY"/>
           </a:p>
@@ -4599,7 +4708,7 @@
           <a:p>
             <a:fld id="{1CD01395-AC05-405C-BAB9-E5D2B9FDBB40}" type="datetimeFigureOut">
               <a:rPr lang="en-MY" smtClean="0"/>
-              <a:t>18/6/2026</a:t>
+              <a:t>19/6/2026</a:t>
             </a:fld>
             <a:endParaRPr lang="en-MY"/>
           </a:p>
@@ -4804,7 +4913,7 @@
           <a:p>
             <a:fld id="{1CD01395-AC05-405C-BAB9-E5D2B9FDBB40}" type="datetimeFigureOut">
               <a:rPr lang="en-MY" smtClean="0"/>
-              <a:t>18/6/2026</a:t>
+              <a:t>19/6/2026</a:t>
             </a:fld>
             <a:endParaRPr lang="en-MY"/>
           </a:p>
@@ -5084,7 +5193,7 @@
           <a:p>
             <a:fld id="{1CD01395-AC05-405C-BAB9-E5D2B9FDBB40}" type="datetimeFigureOut">
               <a:rPr lang="en-MY" smtClean="0"/>
-              <a:t>18/6/2026</a:t>
+              <a:t>19/6/2026</a:t>
             </a:fld>
             <a:endParaRPr lang="en-MY"/>
           </a:p>
@@ -5351,7 +5460,7 @@
           <a:p>
             <a:fld id="{1CD01395-AC05-405C-BAB9-E5D2B9FDBB40}" type="datetimeFigureOut">
               <a:rPr lang="en-MY" smtClean="0"/>
-              <a:t>18/6/2026</a:t>
+              <a:t>19/6/2026</a:t>
             </a:fld>
             <a:endParaRPr lang="en-MY"/>
           </a:p>
@@ -5766,7 +5875,7 @@
           <a:p>
             <a:fld id="{1CD01395-AC05-405C-BAB9-E5D2B9FDBB40}" type="datetimeFigureOut">
               <a:rPr lang="en-MY" smtClean="0"/>
-              <a:t>18/6/2026</a:t>
+              <a:t>19/6/2026</a:t>
             </a:fld>
             <a:endParaRPr lang="en-MY"/>
           </a:p>
@@ -5914,7 +6023,7 @@
           <a:p>
             <a:fld id="{1CD01395-AC05-405C-BAB9-E5D2B9FDBB40}" type="datetimeFigureOut">
               <a:rPr lang="en-MY" smtClean="0"/>
-              <a:t>18/6/2026</a:t>
+              <a:t>19/6/2026</a:t>
             </a:fld>
             <a:endParaRPr lang="en-MY"/>
           </a:p>
@@ -6039,7 +6148,7 @@
           <a:p>
             <a:fld id="{1CD01395-AC05-405C-BAB9-E5D2B9FDBB40}" type="datetimeFigureOut">
               <a:rPr lang="en-MY" smtClean="0"/>
-              <a:t>18/6/2026</a:t>
+              <a:t>19/6/2026</a:t>
             </a:fld>
             <a:endParaRPr lang="en-MY"/>
           </a:p>
@@ -6318,7 +6427,7 @@
           <a:p>
             <a:fld id="{1CD01395-AC05-405C-BAB9-E5D2B9FDBB40}" type="datetimeFigureOut">
               <a:rPr lang="en-MY" smtClean="0"/>
-              <a:t>18/6/2026</a:t>
+              <a:t>19/6/2026</a:t>
             </a:fld>
             <a:endParaRPr lang="en-MY"/>
           </a:p>
@@ -6633,7 +6742,7 @@
           <a:p>
             <a:fld id="{1CD01395-AC05-405C-BAB9-E5D2B9FDBB40}" type="datetimeFigureOut">
               <a:rPr lang="en-MY" smtClean="0"/>
-              <a:t>18/6/2026</a:t>
+              <a:t>19/6/2026</a:t>
             </a:fld>
             <a:endParaRPr lang="en-MY"/>
           </a:p>
@@ -6886,7 +6995,7 @@
           <a:p>
             <a:fld id="{1CD01395-AC05-405C-BAB9-E5D2B9FDBB40}" type="datetimeFigureOut">
               <a:rPr lang="en-MY" smtClean="0"/>
-              <a:t>18/6/2026</a:t>
+              <a:t>19/6/2026</a:t>
             </a:fld>
             <a:endParaRPr lang="en-MY"/>
           </a:p>
@@ -7408,6 +7517,80 @@
 </file>
 
 <file path=ppt/slides/slide10.xml><?xml version="1.0" encoding="utf-8"?>
+<p:sld xmlns:a="http://schemas.openxmlformats.org/drawingml/2006/main" xmlns:r="http://schemas.openxmlformats.org/officeDocument/2006/relationships" xmlns:p="http://schemas.openxmlformats.org/presentationml/2006/main" showMasterSp="0">
+  <p:cSld>
+    <p:bg>
+      <p:bgPr>
+        <a:solidFill>
+          <a:schemeClr val="bg1"/>
+        </a:solidFill>
+        <a:effectLst/>
+      </p:bgPr>
+    </p:bg>
+    <p:spTree>
+      <p:nvGrpSpPr>
+        <p:cNvPr id="1" name="">
+          <a:extLst>
+            <a:ext uri="{FF2B5EF4-FFF2-40B4-BE49-F238E27FC236}">
+              <a16:creationId xmlns:a16="http://schemas.microsoft.com/office/drawing/2014/main" id="{F0F2548E-9A0F-EFA7-4A68-4D96B0D0C79A}"/>
+            </a:ext>
+          </a:extLst>
+        </p:cNvPr>
+        <p:cNvGrpSpPr/>
+        <p:nvPr/>
+      </p:nvGrpSpPr>
+      <p:grpSpPr>
+        <a:xfrm>
+          <a:off x="0" y="0"/>
+          <a:ext cx="0" cy="0"/>
+          <a:chOff x="0" y="0"/>
+          <a:chExt cx="0" cy="0"/>
+        </a:xfrm>
+      </p:grpSpPr>
+      <p:pic>
+        <p:nvPicPr>
+          <p:cNvPr id="5" name="Picture 4">
+            <a:extLst>
+              <a:ext uri="{FF2B5EF4-FFF2-40B4-BE49-F238E27FC236}">
+                <a16:creationId xmlns:a16="http://schemas.microsoft.com/office/drawing/2014/main" id="{4993614A-CAD1-31A5-3EFA-9390AA2C9D9F}"/>
+              </a:ext>
+            </a:extLst>
+          </p:cNvPr>
+          <p:cNvPicPr>
+            <a:picLocks noChangeAspect="1"/>
+          </p:cNvPicPr>
+          <p:nvPr/>
+        </p:nvPicPr>
+        <p:blipFill>
+          <a:blip r:embed="rId3"/>
+          <a:stretch>
+            <a:fillRect/>
+          </a:stretch>
+        </p:blipFill>
+        <p:spPr>
+          <a:xfrm>
+            <a:off x="4327523" y="137160"/>
+            <a:ext cx="3536954" cy="6331890"/>
+          </a:xfrm>
+          <a:prstGeom prst="rect">
+            <a:avLst/>
+          </a:prstGeom>
+        </p:spPr>
+      </p:pic>
+    </p:spTree>
+    <p:extLst>
+      <p:ext uri="{BB962C8B-B14F-4D97-AF65-F5344CB8AC3E}">
+        <p14:creationId xmlns:p14="http://schemas.microsoft.com/office/powerpoint/2010/main" val="3829516895"/>
+      </p:ext>
+    </p:extLst>
+  </p:cSld>
+  <p:clrMapOvr>
+    <a:masterClrMapping/>
+  </p:clrMapOvr>
+</p:sld>
+</file>
+
+<file path=ppt/slides/slide11.xml><?xml version="1.0" encoding="utf-8"?>
 <p:sld xmlns:a="http://schemas.openxmlformats.org/drawingml/2006/main" xmlns:r="http://schemas.openxmlformats.org/officeDocument/2006/relationships" xmlns:p="http://schemas.openxmlformats.org/presentationml/2006/main">
   <p:cSld>
     <p:spTree>

--- a/1.training_model/supplementary/Device Identifier 20260520.pptx
+++ b/1.training_model/supplementary/Device Identifier 20260520.pptx
@@ -15,9 +15,9 @@
     <p:sldId id="329" r:id="rId6"/>
     <p:sldId id="330" r:id="rId7"/>
     <p:sldId id="331" r:id="rId8"/>
-    <p:sldId id="323" r:id="rId9"/>
-    <p:sldId id="327" r:id="rId10"/>
-    <p:sldId id="332" r:id="rId11"/>
+    <p:sldId id="332" r:id="rId9"/>
+    <p:sldId id="323" r:id="rId10"/>
+    <p:sldId id="327" r:id="rId11"/>
     <p:sldId id="326" r:id="rId12"/>
   </p:sldIdLst>
   <p:sldSz cx="12192000" cy="6858000"/>
@@ -207,7 +207,7 @@
           <a:p>
             <a:fld id="{23D8B80A-F233-4240-BDAF-6537AE249829}" type="datetimeFigureOut">
               <a:rPr lang="en-MY" smtClean="0"/>
-              <a:t>19/6/2026</a:t>
+              <a:t>22/6/2026</a:t>
             </a:fld>
             <a:endParaRPr lang="en-MY"/>
           </a:p>
@@ -1083,6 +1083,114 @@
         <p:cNvPr id="1" name="">
           <a:extLst>
             <a:ext uri="{FF2B5EF4-FFF2-40B4-BE49-F238E27FC236}">
+              <a16:creationId xmlns:a16="http://schemas.microsoft.com/office/drawing/2014/main" id="{AA54A910-8722-BE0D-ECC6-AE331ECADDCC}"/>
+            </a:ext>
+          </a:extLst>
+        </p:cNvPr>
+        <p:cNvGrpSpPr/>
+        <p:nvPr/>
+      </p:nvGrpSpPr>
+      <p:grpSpPr>
+        <a:xfrm>
+          <a:off x="0" y="0"/>
+          <a:ext cx="0" cy="0"/>
+          <a:chOff x="0" y="0"/>
+          <a:chExt cx="0" cy="0"/>
+        </a:xfrm>
+      </p:grpSpPr>
+      <p:sp>
+        <p:nvSpPr>
+          <p:cNvPr id="2" name="Slide Image Placeholder 1">
+            <a:extLst>
+              <a:ext uri="{FF2B5EF4-FFF2-40B4-BE49-F238E27FC236}">
+                <a16:creationId xmlns:a16="http://schemas.microsoft.com/office/drawing/2014/main" id="{C9FF1B51-0D4E-F4D9-C462-F4905C8AAF9C}"/>
+              </a:ext>
+            </a:extLst>
+          </p:cNvPr>
+          <p:cNvSpPr>
+            <a:spLocks noGrp="1" noRot="1" noChangeAspect="1"/>
+          </p:cNvSpPr>
+          <p:nvPr>
+            <p:ph type="sldImg"/>
+          </p:nvPr>
+        </p:nvSpPr>
+        <p:spPr/>
+      </p:sp>
+      <p:sp>
+        <p:nvSpPr>
+          <p:cNvPr id="3" name="Notes Placeholder 2">
+            <a:extLst>
+              <a:ext uri="{FF2B5EF4-FFF2-40B4-BE49-F238E27FC236}">
+                <a16:creationId xmlns:a16="http://schemas.microsoft.com/office/drawing/2014/main" id="{C41BCF9F-3AF4-EF24-64C9-01366B660CC8}"/>
+              </a:ext>
+            </a:extLst>
+          </p:cNvPr>
+          <p:cNvSpPr>
+            <a:spLocks noGrp="1"/>
+          </p:cNvSpPr>
+          <p:nvPr>
+            <p:ph type="body" idx="1"/>
+          </p:nvPr>
+        </p:nvSpPr>
+        <p:spPr/>
+        <p:txBody>
+          <a:bodyPr/>
+          <a:lstStyle/>
+          <a:p>
+            <a:endParaRPr lang="en-MY" dirty="0"/>
+          </a:p>
+        </p:txBody>
+      </p:sp>
+      <p:sp>
+        <p:nvSpPr>
+          <p:cNvPr id="4" name="Slide Number Placeholder 3">
+            <a:extLst>
+              <a:ext uri="{FF2B5EF4-FFF2-40B4-BE49-F238E27FC236}">
+                <a16:creationId xmlns:a16="http://schemas.microsoft.com/office/drawing/2014/main" id="{7A6CF6CA-73F6-4CE7-341F-2286B37A0478}"/>
+              </a:ext>
+            </a:extLst>
+          </p:cNvPr>
+          <p:cNvSpPr>
+            <a:spLocks noGrp="1"/>
+          </p:cNvSpPr>
+          <p:nvPr>
+            <p:ph type="sldNum" sz="quarter" idx="5"/>
+          </p:nvPr>
+        </p:nvSpPr>
+        <p:spPr/>
+        <p:txBody>
+          <a:bodyPr/>
+          <a:lstStyle/>
+          <a:p>
+            <a:fld id="{D16833E0-5E66-4D1D-89F5-BD860FDD8F71}" type="slidenum">
+              <a:rPr lang="en-MY" smtClean="0"/>
+              <a:t>8</a:t>
+            </a:fld>
+            <a:endParaRPr lang="en-MY"/>
+          </a:p>
+        </p:txBody>
+      </p:sp>
+    </p:spTree>
+    <p:extLst>
+      <p:ext uri="{BB962C8B-B14F-4D97-AF65-F5344CB8AC3E}">
+        <p14:creationId xmlns:p14="http://schemas.microsoft.com/office/powerpoint/2010/main" val="4002248972"/>
+      </p:ext>
+    </p:extLst>
+  </p:cSld>
+  <p:clrMapOvr>
+    <a:masterClrMapping/>
+  </p:clrMapOvr>
+</p:notes>
+</file>
+
+<file path=ppt/notesSlides/notesSlide8.xml><?xml version="1.0" encoding="utf-8"?>
+<p:notes xmlns:a="http://schemas.openxmlformats.org/drawingml/2006/main" xmlns:r="http://schemas.openxmlformats.org/officeDocument/2006/relationships" xmlns:p="http://schemas.openxmlformats.org/presentationml/2006/main">
+  <p:cSld>
+    <p:spTree>
+      <p:nvGrpSpPr>
+        <p:cNvPr id="1" name="">
+          <a:extLst>
+            <a:ext uri="{FF2B5EF4-FFF2-40B4-BE49-F238E27FC236}">
               <a16:creationId xmlns:a16="http://schemas.microsoft.com/office/drawing/2014/main" id="{A183267B-B82B-1EDC-363F-2C9961D70AB9}"/>
             </a:ext>
           </a:extLst>
@@ -1164,7 +1272,7 @@
           <a:p>
             <a:fld id="{D16833E0-5E66-4D1D-89F5-BD860FDD8F71}" type="slidenum">
               <a:rPr lang="en-MY" smtClean="0"/>
-              <a:t>8</a:t>
+              <a:t>9</a:t>
             </a:fld>
             <a:endParaRPr lang="en-MY"/>
           </a:p>
@@ -1183,7 +1291,7 @@
 </p:notes>
 </file>
 
-<file path=ppt/notesSlides/notesSlide8.xml><?xml version="1.0" encoding="utf-8"?>
+<file path=ppt/notesSlides/notesSlide9.xml><?xml version="1.0" encoding="utf-8"?>
 <p:notes xmlns:a="http://schemas.openxmlformats.org/drawingml/2006/main" xmlns:r="http://schemas.openxmlformats.org/officeDocument/2006/relationships" xmlns:p="http://schemas.openxmlformats.org/presentationml/2006/main">
   <p:cSld>
     <p:spTree>
@@ -1272,7 +1380,7 @@
           <a:p>
             <a:fld id="{D16833E0-5E66-4D1D-89F5-BD860FDD8F71}" type="slidenum">
               <a:rPr lang="en-MY" smtClean="0"/>
-              <a:t>9</a:t>
+              <a:t>10</a:t>
             </a:fld>
             <a:endParaRPr lang="en-MY"/>
           </a:p>
@@ -1282,114 +1390,6 @@
     <p:extLst>
       <p:ext uri="{BB962C8B-B14F-4D97-AF65-F5344CB8AC3E}">
         <p14:creationId xmlns:p14="http://schemas.microsoft.com/office/powerpoint/2010/main" val="127372749"/>
-      </p:ext>
-    </p:extLst>
-  </p:cSld>
-  <p:clrMapOvr>
-    <a:masterClrMapping/>
-  </p:clrMapOvr>
-</p:notes>
-</file>
-
-<file path=ppt/notesSlides/notesSlide9.xml><?xml version="1.0" encoding="utf-8"?>
-<p:notes xmlns:a="http://schemas.openxmlformats.org/drawingml/2006/main" xmlns:r="http://schemas.openxmlformats.org/officeDocument/2006/relationships" xmlns:p="http://schemas.openxmlformats.org/presentationml/2006/main">
-  <p:cSld>
-    <p:spTree>
-      <p:nvGrpSpPr>
-        <p:cNvPr id="1" name="">
-          <a:extLst>
-            <a:ext uri="{FF2B5EF4-FFF2-40B4-BE49-F238E27FC236}">
-              <a16:creationId xmlns:a16="http://schemas.microsoft.com/office/drawing/2014/main" id="{AA54A910-8722-BE0D-ECC6-AE331ECADDCC}"/>
-            </a:ext>
-          </a:extLst>
-        </p:cNvPr>
-        <p:cNvGrpSpPr/>
-        <p:nvPr/>
-      </p:nvGrpSpPr>
-      <p:grpSpPr>
-        <a:xfrm>
-          <a:off x="0" y="0"/>
-          <a:ext cx="0" cy="0"/>
-          <a:chOff x="0" y="0"/>
-          <a:chExt cx="0" cy="0"/>
-        </a:xfrm>
-      </p:grpSpPr>
-      <p:sp>
-        <p:nvSpPr>
-          <p:cNvPr id="2" name="Slide Image Placeholder 1">
-            <a:extLst>
-              <a:ext uri="{FF2B5EF4-FFF2-40B4-BE49-F238E27FC236}">
-                <a16:creationId xmlns:a16="http://schemas.microsoft.com/office/drawing/2014/main" id="{C9FF1B51-0D4E-F4D9-C462-F4905C8AAF9C}"/>
-              </a:ext>
-            </a:extLst>
-          </p:cNvPr>
-          <p:cNvSpPr>
-            <a:spLocks noGrp="1" noRot="1" noChangeAspect="1"/>
-          </p:cNvSpPr>
-          <p:nvPr>
-            <p:ph type="sldImg"/>
-          </p:nvPr>
-        </p:nvSpPr>
-        <p:spPr/>
-      </p:sp>
-      <p:sp>
-        <p:nvSpPr>
-          <p:cNvPr id="3" name="Notes Placeholder 2">
-            <a:extLst>
-              <a:ext uri="{FF2B5EF4-FFF2-40B4-BE49-F238E27FC236}">
-                <a16:creationId xmlns:a16="http://schemas.microsoft.com/office/drawing/2014/main" id="{C41BCF9F-3AF4-EF24-64C9-01366B660CC8}"/>
-              </a:ext>
-            </a:extLst>
-          </p:cNvPr>
-          <p:cNvSpPr>
-            <a:spLocks noGrp="1"/>
-          </p:cNvSpPr>
-          <p:nvPr>
-            <p:ph type="body" idx="1"/>
-          </p:nvPr>
-        </p:nvSpPr>
-        <p:spPr/>
-        <p:txBody>
-          <a:bodyPr/>
-          <a:lstStyle/>
-          <a:p>
-            <a:endParaRPr lang="en-MY" dirty="0"/>
-          </a:p>
-        </p:txBody>
-      </p:sp>
-      <p:sp>
-        <p:nvSpPr>
-          <p:cNvPr id="4" name="Slide Number Placeholder 3">
-            <a:extLst>
-              <a:ext uri="{FF2B5EF4-FFF2-40B4-BE49-F238E27FC236}">
-                <a16:creationId xmlns:a16="http://schemas.microsoft.com/office/drawing/2014/main" id="{7A6CF6CA-73F6-4CE7-341F-2286B37A0478}"/>
-              </a:ext>
-            </a:extLst>
-          </p:cNvPr>
-          <p:cNvSpPr>
-            <a:spLocks noGrp="1"/>
-          </p:cNvSpPr>
-          <p:nvPr>
-            <p:ph type="sldNum" sz="quarter" idx="5"/>
-          </p:nvPr>
-        </p:nvSpPr>
-        <p:spPr/>
-        <p:txBody>
-          <a:bodyPr/>
-          <a:lstStyle/>
-          <a:p>
-            <a:fld id="{D16833E0-5E66-4D1D-89F5-BD860FDD8F71}" type="slidenum">
-              <a:rPr lang="en-MY" smtClean="0"/>
-              <a:t>10</a:t>
-            </a:fld>
-            <a:endParaRPr lang="en-MY"/>
-          </a:p>
-        </p:txBody>
-      </p:sp>
-    </p:spTree>
-    <p:extLst>
-      <p:ext uri="{BB962C8B-B14F-4D97-AF65-F5344CB8AC3E}">
-        <p14:creationId xmlns:p14="http://schemas.microsoft.com/office/powerpoint/2010/main" val="4002248972"/>
       </p:ext>
     </p:extLst>
   </p:cSld>
@@ -1570,7 +1570,7 @@
           <a:p>
             <a:fld id="{1CD01395-AC05-405C-BAB9-E5D2B9FDBB40}" type="datetimeFigureOut">
               <a:rPr lang="en-MY" smtClean="0"/>
-              <a:t>19/6/2026</a:t>
+              <a:t>22/6/2026</a:t>
             </a:fld>
             <a:endParaRPr lang="en-MY"/>
           </a:p>
@@ -1885,7 +1885,7 @@
           <a:p>
             <a:fld id="{1CD01395-AC05-405C-BAB9-E5D2B9FDBB40}" type="datetimeFigureOut">
               <a:rPr lang="en-MY" smtClean="0"/>
-              <a:t>19/6/2026</a:t>
+              <a:t>22/6/2026</a:t>
             </a:fld>
             <a:endParaRPr lang="en-MY"/>
           </a:p>
@@ -2107,7 +2107,7 @@
           <a:p>
             <a:fld id="{1CD01395-AC05-405C-BAB9-E5D2B9FDBB40}" type="datetimeFigureOut">
               <a:rPr lang="en-MY" smtClean="0"/>
-              <a:t>19/6/2026</a:t>
+              <a:t>22/6/2026</a:t>
             </a:fld>
             <a:endParaRPr lang="en-MY"/>
           </a:p>
@@ -2398,7 +2398,7 @@
           <a:p>
             <a:fld id="{1CD01395-AC05-405C-BAB9-E5D2B9FDBB40}" type="datetimeFigureOut">
               <a:rPr lang="en-MY" smtClean="0"/>
-              <a:t>19/6/2026</a:t>
+              <a:t>22/6/2026</a:t>
             </a:fld>
             <a:endParaRPr lang="en-MY"/>
           </a:p>
@@ -2852,7 +2852,7 @@
           <a:p>
             <a:fld id="{1CD01395-AC05-405C-BAB9-E5D2B9FDBB40}" type="datetimeFigureOut">
               <a:rPr lang="en-MY" smtClean="0"/>
-              <a:t>19/6/2026</a:t>
+              <a:t>22/6/2026</a:t>
             </a:fld>
             <a:endParaRPr lang="en-MY"/>
           </a:p>
@@ -3428,7 +3428,7 @@
           <a:p>
             <a:fld id="{1CD01395-AC05-405C-BAB9-E5D2B9FDBB40}" type="datetimeFigureOut">
               <a:rPr lang="en-MY" smtClean="0"/>
-              <a:t>19/6/2026</a:t>
+              <a:t>22/6/2026</a:t>
             </a:fld>
             <a:endParaRPr lang="en-MY"/>
           </a:p>
@@ -4289,7 +4289,7 @@
           <a:p>
             <a:fld id="{1CD01395-AC05-405C-BAB9-E5D2B9FDBB40}" type="datetimeFigureOut">
               <a:rPr lang="en-MY" smtClean="0"/>
-              <a:t>19/6/2026</a:t>
+              <a:t>22/6/2026</a:t>
             </a:fld>
             <a:endParaRPr lang="en-MY"/>
           </a:p>
@@ -4494,7 +4494,7 @@
           <a:p>
             <a:fld id="{1CD01395-AC05-405C-BAB9-E5D2B9FDBB40}" type="datetimeFigureOut">
               <a:rPr lang="en-MY" smtClean="0"/>
-              <a:t>19/6/2026</a:t>
+              <a:t>22/6/2026</a:t>
             </a:fld>
             <a:endParaRPr lang="en-MY"/>
           </a:p>
@@ -4708,7 +4708,7 @@
           <a:p>
             <a:fld id="{1CD01395-AC05-405C-BAB9-E5D2B9FDBB40}" type="datetimeFigureOut">
               <a:rPr lang="en-MY" smtClean="0"/>
-              <a:t>19/6/2026</a:t>
+              <a:t>22/6/2026</a:t>
             </a:fld>
             <a:endParaRPr lang="en-MY"/>
           </a:p>
@@ -4913,7 +4913,7 @@
           <a:p>
             <a:fld id="{1CD01395-AC05-405C-BAB9-E5D2B9FDBB40}" type="datetimeFigureOut">
               <a:rPr lang="en-MY" smtClean="0"/>
-              <a:t>19/6/2026</a:t>
+              <a:t>22/6/2026</a:t>
             </a:fld>
             <a:endParaRPr lang="en-MY"/>
           </a:p>
@@ -5193,7 +5193,7 @@
           <a:p>
             <a:fld id="{1CD01395-AC05-405C-BAB9-E5D2B9FDBB40}" type="datetimeFigureOut">
               <a:rPr lang="en-MY" smtClean="0"/>
-              <a:t>19/6/2026</a:t>
+              <a:t>22/6/2026</a:t>
             </a:fld>
             <a:endParaRPr lang="en-MY"/>
           </a:p>
@@ -5460,7 +5460,7 @@
           <a:p>
             <a:fld id="{1CD01395-AC05-405C-BAB9-E5D2B9FDBB40}" type="datetimeFigureOut">
               <a:rPr lang="en-MY" smtClean="0"/>
-              <a:t>19/6/2026</a:t>
+              <a:t>22/6/2026</a:t>
             </a:fld>
             <a:endParaRPr lang="en-MY"/>
           </a:p>
@@ -5875,7 +5875,7 @@
           <a:p>
             <a:fld id="{1CD01395-AC05-405C-BAB9-E5D2B9FDBB40}" type="datetimeFigureOut">
               <a:rPr lang="en-MY" smtClean="0"/>
-              <a:t>19/6/2026</a:t>
+              <a:t>22/6/2026</a:t>
             </a:fld>
             <a:endParaRPr lang="en-MY"/>
           </a:p>
@@ -6023,7 +6023,7 @@
           <a:p>
             <a:fld id="{1CD01395-AC05-405C-BAB9-E5D2B9FDBB40}" type="datetimeFigureOut">
               <a:rPr lang="en-MY" smtClean="0"/>
-              <a:t>19/6/2026</a:t>
+              <a:t>22/6/2026</a:t>
             </a:fld>
             <a:endParaRPr lang="en-MY"/>
           </a:p>
@@ -6148,7 +6148,7 @@
           <a:p>
             <a:fld id="{1CD01395-AC05-405C-BAB9-E5D2B9FDBB40}" type="datetimeFigureOut">
               <a:rPr lang="en-MY" smtClean="0"/>
-              <a:t>19/6/2026</a:t>
+              <a:t>22/6/2026</a:t>
             </a:fld>
             <a:endParaRPr lang="en-MY"/>
           </a:p>
@@ -6427,7 +6427,7 @@
           <a:p>
             <a:fld id="{1CD01395-AC05-405C-BAB9-E5D2B9FDBB40}" type="datetimeFigureOut">
               <a:rPr lang="en-MY" smtClean="0"/>
-              <a:t>19/6/2026</a:t>
+              <a:t>22/6/2026</a:t>
             </a:fld>
             <a:endParaRPr lang="en-MY"/>
           </a:p>
@@ -6742,7 +6742,7 @@
           <a:p>
             <a:fld id="{1CD01395-AC05-405C-BAB9-E5D2B9FDBB40}" type="datetimeFigureOut">
               <a:rPr lang="en-MY" smtClean="0"/>
-              <a:t>19/6/2026</a:t>
+              <a:t>22/6/2026</a:t>
             </a:fld>
             <a:endParaRPr lang="en-MY"/>
           </a:p>
@@ -6995,7 +6995,7 @@
           <a:p>
             <a:fld id="{1CD01395-AC05-405C-BAB9-E5D2B9FDBB40}" type="datetimeFigureOut">
               <a:rPr lang="en-MY" smtClean="0"/>
-              <a:t>19/6/2026</a:t>
+              <a:t>22/6/2026</a:t>
             </a:fld>
             <a:endParaRPr lang="en-MY"/>
           </a:p>
@@ -7522,7 +7522,7 @@
     <p:bg>
       <p:bgPr>
         <a:solidFill>
-          <a:schemeClr val="bg1"/>
+          <a:srgbClr val="CDF6F9"/>
         </a:solidFill>
         <a:effectLst/>
       </p:bgPr>
@@ -7532,7 +7532,7 @@
         <p:cNvPr id="1" name="">
           <a:extLst>
             <a:ext uri="{FF2B5EF4-FFF2-40B4-BE49-F238E27FC236}">
-              <a16:creationId xmlns:a16="http://schemas.microsoft.com/office/drawing/2014/main" id="{F0F2548E-9A0F-EFA7-4A68-4D96B0D0C79A}"/>
+              <a16:creationId xmlns:a16="http://schemas.microsoft.com/office/drawing/2014/main" id="{700F46A2-011D-3546-0B8A-E87BD8F1A4B0}"/>
             </a:ext>
           </a:extLst>
         </p:cNvPr>
@@ -7547,12 +7547,55 @@
           <a:chExt cx="0" cy="0"/>
         </a:xfrm>
       </p:grpSpPr>
+      <p:sp>
+        <p:nvSpPr>
+          <p:cNvPr id="2" name="TextBox 1">
+            <a:extLst>
+              <a:ext uri="{FF2B5EF4-FFF2-40B4-BE49-F238E27FC236}">
+                <a16:creationId xmlns:a16="http://schemas.microsoft.com/office/drawing/2014/main" id="{D2532F23-4670-2ED4-3919-B3B8454E3933}"/>
+              </a:ext>
+            </a:extLst>
+          </p:cNvPr>
+          <p:cNvSpPr txBox="1"/>
+          <p:nvPr/>
+        </p:nvSpPr>
+        <p:spPr>
+          <a:xfrm>
+            <a:off x="1063259" y="2767280"/>
+            <a:ext cx="4852419" cy="1323439"/>
+          </a:xfrm>
+          <a:prstGeom prst="rect">
+            <a:avLst/>
+          </a:prstGeom>
+          <a:noFill/>
+        </p:spPr>
+        <p:txBody>
+          <a:bodyPr wrap="none" rtlCol="0">
+            <a:spAutoFit/>
+          </a:bodyPr>
+          <a:lstStyle/>
+          <a:p>
+            <a:r>
+              <a:rPr lang="en-US" sz="4000" dirty="0" err="1"/>
+              <a:t>DeviceIdentifierLibrary</a:t>
+            </a:r>
+            <a:endParaRPr lang="en-US" sz="4000" dirty="0"/>
+          </a:p>
+          <a:p>
+            <a:pPr algn="ctr"/>
+            <a:r>
+              <a:rPr lang="en-US" sz="4000" dirty="0"/>
+              <a:t>workflow</a:t>
+            </a:r>
+          </a:p>
+        </p:txBody>
+      </p:sp>
       <p:pic>
         <p:nvPicPr>
-          <p:cNvPr id="5" name="Picture 4">
+          <p:cNvPr id="4" name="Picture 3">
             <a:extLst>
               <a:ext uri="{FF2B5EF4-FFF2-40B4-BE49-F238E27FC236}">
-                <a16:creationId xmlns:a16="http://schemas.microsoft.com/office/drawing/2014/main" id="{4993614A-CAD1-31A5-3EFA-9390AA2C9D9F}"/>
+                <a16:creationId xmlns:a16="http://schemas.microsoft.com/office/drawing/2014/main" id="{590A2A64-8894-0919-1FE3-D9F8E44114DA}"/>
               </a:ext>
             </a:extLst>
           </p:cNvPr>
@@ -7562,15 +7605,21 @@
           <p:nvPr/>
         </p:nvPicPr>
         <p:blipFill>
-          <a:blip r:embed="rId3"/>
+          <a:blip r:embed="rId3">
+            <a:extLst>
+              <a:ext uri="{28A0092B-C50C-407E-A947-70E740481C1C}">
+                <a14:useLocalDpi xmlns:a14="http://schemas.microsoft.com/office/drawing/2010/main" val="0"/>
+              </a:ext>
+            </a:extLst>
+          </a:blip>
           <a:stretch>
             <a:fillRect/>
           </a:stretch>
         </p:blipFill>
         <p:spPr>
           <a:xfrm>
-            <a:off x="4327523" y="137160"/>
-            <a:ext cx="3536954" cy="6331890"/>
+            <a:off x="7099284" y="230886"/>
+            <a:ext cx="4264152" cy="6396228"/>
           </a:xfrm>
           <a:prstGeom prst="rect">
             <a:avLst/>
@@ -7580,7 +7629,7 @@
     </p:spTree>
     <p:extLst>
       <p:ext uri="{BB962C8B-B14F-4D97-AF65-F5344CB8AC3E}">
-        <p14:creationId xmlns:p14="http://schemas.microsoft.com/office/powerpoint/2010/main" val="3829516895"/>
+        <p14:creationId xmlns:p14="http://schemas.microsoft.com/office/powerpoint/2010/main" val="975718132"/>
       </p:ext>
     </p:extLst>
   </p:cSld>
@@ -13466,14 +13515,64 @@
         </p:blipFill>
         <p:spPr>
           <a:xfrm>
-            <a:off x="2990088" y="703237"/>
-            <a:ext cx="5577840" cy="4787717"/>
+            <a:off x="5373551" y="817962"/>
+            <a:ext cx="6083881" cy="5222075"/>
           </a:xfrm>
           <a:prstGeom prst="rect">
             <a:avLst/>
           </a:prstGeom>
         </p:spPr>
       </p:pic>
+      <p:sp>
+        <p:nvSpPr>
+          <p:cNvPr id="3" name="TextBox 2">
+            <a:extLst>
+              <a:ext uri="{FF2B5EF4-FFF2-40B4-BE49-F238E27FC236}">
+                <a16:creationId xmlns:a16="http://schemas.microsoft.com/office/drawing/2014/main" id="{E79CD4A6-8A4A-78B4-07C1-7E0686FA18EC}"/>
+              </a:ext>
+            </a:extLst>
+          </p:cNvPr>
+          <p:cNvSpPr txBox="1"/>
+          <p:nvPr/>
+        </p:nvSpPr>
+        <p:spPr>
+          <a:xfrm>
+            <a:off x="734568" y="2282648"/>
+            <a:ext cx="4237378" cy="1938992"/>
+          </a:xfrm>
+          <a:prstGeom prst="rect">
+            <a:avLst/>
+          </a:prstGeom>
+          <a:noFill/>
+        </p:spPr>
+        <p:txBody>
+          <a:bodyPr wrap="none" rtlCol="0">
+            <a:spAutoFit/>
+          </a:bodyPr>
+          <a:lstStyle/>
+          <a:p>
+            <a:pPr algn="ctr"/>
+            <a:r>
+              <a:rPr lang="en-US" sz="4000" dirty="0"/>
+              <a:t>manual assign </a:t>
+            </a:r>
+          </a:p>
+          <a:p>
+            <a:pPr algn="ctr"/>
+            <a:r>
+              <a:rPr lang="en-US" sz="4000" dirty="0"/>
+              <a:t>type, section, cluster</a:t>
+            </a:r>
+          </a:p>
+          <a:p>
+            <a:pPr algn="ctr"/>
+            <a:r>
+              <a:rPr lang="en-US" sz="4000" dirty="0"/>
+              <a:t>workflow</a:t>
+            </a:r>
+          </a:p>
+        </p:txBody>
+      </p:sp>
     </p:spTree>
     <p:extLst>
       <p:ext uri="{BB962C8B-B14F-4D97-AF65-F5344CB8AC3E}">
@@ -13488,6 +13587,130 @@
 </file>
 
 <file path=ppt/slides/slide8.xml><?xml version="1.0" encoding="utf-8"?>
+<p:sld xmlns:a="http://schemas.openxmlformats.org/drawingml/2006/main" xmlns:r="http://schemas.openxmlformats.org/officeDocument/2006/relationships" xmlns:p="http://schemas.openxmlformats.org/presentationml/2006/main" showMasterSp="0">
+  <p:cSld>
+    <p:bg>
+      <p:bgPr>
+        <a:solidFill>
+          <a:schemeClr val="bg1"/>
+        </a:solidFill>
+        <a:effectLst/>
+      </p:bgPr>
+    </p:bg>
+    <p:spTree>
+      <p:nvGrpSpPr>
+        <p:cNvPr id="1" name="">
+          <a:extLst>
+            <a:ext uri="{FF2B5EF4-FFF2-40B4-BE49-F238E27FC236}">
+              <a16:creationId xmlns:a16="http://schemas.microsoft.com/office/drawing/2014/main" id="{F0F2548E-9A0F-EFA7-4A68-4D96B0D0C79A}"/>
+            </a:ext>
+          </a:extLst>
+        </p:cNvPr>
+        <p:cNvGrpSpPr/>
+        <p:nvPr/>
+      </p:nvGrpSpPr>
+      <p:grpSpPr>
+        <a:xfrm>
+          <a:off x="0" y="0"/>
+          <a:ext cx="0" cy="0"/>
+          <a:chOff x="0" y="0"/>
+          <a:chExt cx="0" cy="0"/>
+        </a:xfrm>
+      </p:grpSpPr>
+      <p:pic>
+        <p:nvPicPr>
+          <p:cNvPr id="5" name="Picture 4">
+            <a:extLst>
+              <a:ext uri="{FF2B5EF4-FFF2-40B4-BE49-F238E27FC236}">
+                <a16:creationId xmlns:a16="http://schemas.microsoft.com/office/drawing/2014/main" id="{4993614A-CAD1-31A5-3EFA-9390AA2C9D9F}"/>
+              </a:ext>
+            </a:extLst>
+          </p:cNvPr>
+          <p:cNvPicPr>
+            <a:picLocks noChangeAspect="1"/>
+          </p:cNvPicPr>
+          <p:nvPr/>
+        </p:nvPicPr>
+        <p:blipFill>
+          <a:blip r:embed="rId3"/>
+          <a:stretch>
+            <a:fillRect/>
+          </a:stretch>
+        </p:blipFill>
+        <p:spPr>
+          <a:xfrm>
+            <a:off x="7975979" y="155448"/>
+            <a:ext cx="3536954" cy="6331890"/>
+          </a:xfrm>
+          <a:prstGeom prst="rect">
+            <a:avLst/>
+          </a:prstGeom>
+        </p:spPr>
+      </p:pic>
+      <p:sp>
+        <p:nvSpPr>
+          <p:cNvPr id="3" name="TextBox 2">
+            <a:extLst>
+              <a:ext uri="{FF2B5EF4-FFF2-40B4-BE49-F238E27FC236}">
+                <a16:creationId xmlns:a16="http://schemas.microsoft.com/office/drawing/2014/main" id="{B79596CD-7BBB-CEC9-93CC-478D5B0263B2}"/>
+              </a:ext>
+            </a:extLst>
+          </p:cNvPr>
+          <p:cNvSpPr txBox="1"/>
+          <p:nvPr/>
+        </p:nvSpPr>
+        <p:spPr>
+          <a:xfrm>
+            <a:off x="2645664" y="2246072"/>
+            <a:ext cx="4237378" cy="1938992"/>
+          </a:xfrm>
+          <a:prstGeom prst="rect">
+            <a:avLst/>
+          </a:prstGeom>
+          <a:noFill/>
+        </p:spPr>
+        <p:txBody>
+          <a:bodyPr wrap="none" rtlCol="0">
+            <a:spAutoFit/>
+          </a:bodyPr>
+          <a:lstStyle/>
+          <a:p>
+            <a:pPr algn="ctr"/>
+            <a:r>
+              <a:rPr lang="en-US" sz="4000" dirty="0"/>
+              <a:t>manual assign </a:t>
+            </a:r>
+          </a:p>
+          <a:p>
+            <a:pPr algn="ctr"/>
+            <a:r>
+              <a:rPr lang="en-US" sz="4000" dirty="0"/>
+              <a:t>type, section, cluster</a:t>
+            </a:r>
+          </a:p>
+          <a:p>
+            <a:pPr algn="ctr"/>
+            <a:r>
+              <a:rPr lang="en-US" sz="4000" dirty="0"/>
+              <a:t>workflow</a:t>
+            </a:r>
+          </a:p>
+        </p:txBody>
+      </p:sp>
+    </p:spTree>
+    <p:extLst>
+      <p:ext uri="{BB962C8B-B14F-4D97-AF65-F5344CB8AC3E}">
+        <p14:creationId xmlns:p14="http://schemas.microsoft.com/office/powerpoint/2010/main" val="3829516895"/>
+      </p:ext>
+    </p:extLst>
+  </p:cSld>
+  <p:clrMapOvr>
+    <a:masterClrMapping/>
+  </p:clrMapOvr>
+</p:sld>
+</file>
+
+<file path=ppt/slides/slide9.xml><?xml version="1.0" encoding="utf-8"?>
 <p:sld xmlns:a="http://schemas.openxmlformats.org/drawingml/2006/main" xmlns:r="http://schemas.openxmlformats.org/officeDocument/2006/relationships" xmlns:p="http://schemas.openxmlformats.org/presentationml/2006/main" showMasterSp="0">
   <p:cSld>
     <p:bg>
@@ -13613,121 +13836,6 @@
     <p:extLst>
       <p:ext uri="{BB962C8B-B14F-4D97-AF65-F5344CB8AC3E}">
         <p14:creationId xmlns:p14="http://schemas.microsoft.com/office/powerpoint/2010/main" val="16583078"/>
-      </p:ext>
-    </p:extLst>
-  </p:cSld>
-  <p:clrMapOvr>
-    <a:masterClrMapping/>
-  </p:clrMapOvr>
-</p:sld>
-</file>
-
-<file path=ppt/slides/slide9.xml><?xml version="1.0" encoding="utf-8"?>
-<p:sld xmlns:a="http://schemas.openxmlformats.org/drawingml/2006/main" xmlns:r="http://schemas.openxmlformats.org/officeDocument/2006/relationships" xmlns:p="http://schemas.openxmlformats.org/presentationml/2006/main" showMasterSp="0">
-  <p:cSld>
-    <p:bg>
-      <p:bgPr>
-        <a:solidFill>
-          <a:srgbClr val="CDF6F9"/>
-        </a:solidFill>
-        <a:effectLst/>
-      </p:bgPr>
-    </p:bg>
-    <p:spTree>
-      <p:nvGrpSpPr>
-        <p:cNvPr id="1" name="">
-          <a:extLst>
-            <a:ext uri="{FF2B5EF4-FFF2-40B4-BE49-F238E27FC236}">
-              <a16:creationId xmlns:a16="http://schemas.microsoft.com/office/drawing/2014/main" id="{700F46A2-011D-3546-0B8A-E87BD8F1A4B0}"/>
-            </a:ext>
-          </a:extLst>
-        </p:cNvPr>
-        <p:cNvGrpSpPr/>
-        <p:nvPr/>
-      </p:nvGrpSpPr>
-      <p:grpSpPr>
-        <a:xfrm>
-          <a:off x="0" y="0"/>
-          <a:ext cx="0" cy="0"/>
-          <a:chOff x="0" y="0"/>
-          <a:chExt cx="0" cy="0"/>
-        </a:xfrm>
-      </p:grpSpPr>
-      <p:sp>
-        <p:nvSpPr>
-          <p:cNvPr id="2" name="TextBox 1">
-            <a:extLst>
-              <a:ext uri="{FF2B5EF4-FFF2-40B4-BE49-F238E27FC236}">
-                <a16:creationId xmlns:a16="http://schemas.microsoft.com/office/drawing/2014/main" id="{D2532F23-4670-2ED4-3919-B3B8454E3933}"/>
-              </a:ext>
-            </a:extLst>
-          </p:cNvPr>
-          <p:cNvSpPr txBox="1"/>
-          <p:nvPr/>
-        </p:nvSpPr>
-        <p:spPr>
-          <a:xfrm>
-            <a:off x="6845315" y="768096"/>
-            <a:ext cx="3036793" cy="369332"/>
-          </a:xfrm>
-          <a:prstGeom prst="rect">
-            <a:avLst/>
-          </a:prstGeom>
-          <a:noFill/>
-        </p:spPr>
-        <p:txBody>
-          <a:bodyPr wrap="none" rtlCol="0">
-            <a:spAutoFit/>
-          </a:bodyPr>
-          <a:lstStyle/>
-          <a:p>
-            <a:r>
-              <a:rPr lang="en-US" dirty="0"/>
-              <a:t>HOW TO SORT THE PROJECT?</a:t>
-            </a:r>
-          </a:p>
-        </p:txBody>
-      </p:sp>
-      <p:pic>
-        <p:nvPicPr>
-          <p:cNvPr id="4" name="Picture 3">
-            <a:extLst>
-              <a:ext uri="{FF2B5EF4-FFF2-40B4-BE49-F238E27FC236}">
-                <a16:creationId xmlns:a16="http://schemas.microsoft.com/office/drawing/2014/main" id="{590A2A64-8894-0919-1FE3-D9F8E44114DA}"/>
-              </a:ext>
-            </a:extLst>
-          </p:cNvPr>
-          <p:cNvPicPr>
-            <a:picLocks noChangeAspect="1"/>
-          </p:cNvPicPr>
-          <p:nvPr/>
-        </p:nvPicPr>
-        <p:blipFill>
-          <a:blip r:embed="rId3">
-            <a:extLst>
-              <a:ext uri="{28A0092B-C50C-407E-A947-70E740481C1C}">
-                <a14:useLocalDpi xmlns:a14="http://schemas.microsoft.com/office/drawing/2010/main" val="0"/>
-              </a:ext>
-            </a:extLst>
-          </a:blip>
-          <a:stretch>
-            <a:fillRect/>
-          </a:stretch>
-        </p:blipFill>
-        <p:spPr>
-          <a:xfrm>
-            <a:off x="240299" y="230886"/>
-            <a:ext cx="4264152" cy="6396228"/>
-          </a:xfrm>
-          <a:prstGeom prst="rect">
-            <a:avLst/>
-          </a:prstGeom>
-        </p:spPr>
-      </p:pic>
-    </p:spTree>
-    <p:extLst>
-      <p:ext uri="{BB962C8B-B14F-4D97-AF65-F5344CB8AC3E}">
-        <p14:creationId xmlns:p14="http://schemas.microsoft.com/office/powerpoint/2010/main" val="975718132"/>
       </p:ext>
     </p:extLst>
   </p:cSld>

--- a/1.training_model/supplementary/Device Identifier 20260520.pptx
+++ b/1.training_model/supplementary/Device Identifier 20260520.pptx
@@ -5,7 +5,7 @@
     <p:sldMasterId id="2147483696" r:id="rId1"/>
   </p:sldMasterIdLst>
   <p:notesMasterIdLst>
-    <p:notesMasterId r:id="rId13"/>
+    <p:notesMasterId r:id="rId14"/>
   </p:notesMasterIdLst>
   <p:sldIdLst>
     <p:sldId id="256" r:id="rId2"/>
@@ -17,8 +17,9 @@
     <p:sldId id="331" r:id="rId8"/>
     <p:sldId id="332" r:id="rId9"/>
     <p:sldId id="323" r:id="rId10"/>
-    <p:sldId id="327" r:id="rId11"/>
-    <p:sldId id="326" r:id="rId12"/>
+    <p:sldId id="333" r:id="rId11"/>
+    <p:sldId id="327" r:id="rId12"/>
+    <p:sldId id="326" r:id="rId13"/>
   </p:sldIdLst>
   <p:sldSz cx="12192000" cy="6858000"/>
   <p:notesSz cx="6858000" cy="9144000"/>
@@ -207,7 +208,7 @@
           <a:p>
             <a:fld id="{23D8B80A-F233-4240-BDAF-6537AE249829}" type="datetimeFigureOut">
               <a:rPr lang="en-MY" smtClean="0"/>
-              <a:t>22/6/2026</a:t>
+              <a:t>30/6/2026</a:t>
             </a:fld>
             <a:endParaRPr lang="en-MY"/>
           </a:p>
@@ -559,6 +560,114 @@
 </p:notes>
 </file>
 
+<file path=ppt/notesSlides/notesSlide10.xml><?xml version="1.0" encoding="utf-8"?>
+<p:notes xmlns:a="http://schemas.openxmlformats.org/drawingml/2006/main" xmlns:r="http://schemas.openxmlformats.org/officeDocument/2006/relationships" xmlns:p="http://schemas.openxmlformats.org/presentationml/2006/main">
+  <p:cSld>
+    <p:spTree>
+      <p:nvGrpSpPr>
+        <p:cNvPr id="1" name="">
+          <a:extLst>
+            <a:ext uri="{FF2B5EF4-FFF2-40B4-BE49-F238E27FC236}">
+              <a16:creationId xmlns:a16="http://schemas.microsoft.com/office/drawing/2014/main" id="{E96BB1E2-2CB1-5021-75E5-CF6CCD57DE06}"/>
+            </a:ext>
+          </a:extLst>
+        </p:cNvPr>
+        <p:cNvGrpSpPr/>
+        <p:nvPr/>
+      </p:nvGrpSpPr>
+      <p:grpSpPr>
+        <a:xfrm>
+          <a:off x="0" y="0"/>
+          <a:ext cx="0" cy="0"/>
+          <a:chOff x="0" y="0"/>
+          <a:chExt cx="0" cy="0"/>
+        </a:xfrm>
+      </p:grpSpPr>
+      <p:sp>
+        <p:nvSpPr>
+          <p:cNvPr id="2" name="Slide Image Placeholder 1">
+            <a:extLst>
+              <a:ext uri="{FF2B5EF4-FFF2-40B4-BE49-F238E27FC236}">
+                <a16:creationId xmlns:a16="http://schemas.microsoft.com/office/drawing/2014/main" id="{1B700753-6D9B-7CA5-2453-C8409535183B}"/>
+              </a:ext>
+            </a:extLst>
+          </p:cNvPr>
+          <p:cNvSpPr>
+            <a:spLocks noGrp="1" noRot="1" noChangeAspect="1"/>
+          </p:cNvSpPr>
+          <p:nvPr>
+            <p:ph type="sldImg"/>
+          </p:nvPr>
+        </p:nvSpPr>
+        <p:spPr/>
+      </p:sp>
+      <p:sp>
+        <p:nvSpPr>
+          <p:cNvPr id="3" name="Notes Placeholder 2">
+            <a:extLst>
+              <a:ext uri="{FF2B5EF4-FFF2-40B4-BE49-F238E27FC236}">
+                <a16:creationId xmlns:a16="http://schemas.microsoft.com/office/drawing/2014/main" id="{40D44659-0B80-A575-79ED-8829A738DBDB}"/>
+              </a:ext>
+            </a:extLst>
+          </p:cNvPr>
+          <p:cNvSpPr>
+            <a:spLocks noGrp="1"/>
+          </p:cNvSpPr>
+          <p:nvPr>
+            <p:ph type="body" idx="1"/>
+          </p:nvPr>
+        </p:nvSpPr>
+        <p:spPr/>
+        <p:txBody>
+          <a:bodyPr/>
+          <a:lstStyle/>
+          <a:p>
+            <a:endParaRPr lang="en-MY" dirty="0"/>
+          </a:p>
+        </p:txBody>
+      </p:sp>
+      <p:sp>
+        <p:nvSpPr>
+          <p:cNvPr id="4" name="Slide Number Placeholder 3">
+            <a:extLst>
+              <a:ext uri="{FF2B5EF4-FFF2-40B4-BE49-F238E27FC236}">
+                <a16:creationId xmlns:a16="http://schemas.microsoft.com/office/drawing/2014/main" id="{C33108B5-6282-34C4-DE56-EADE451903FF}"/>
+              </a:ext>
+            </a:extLst>
+          </p:cNvPr>
+          <p:cNvSpPr>
+            <a:spLocks noGrp="1"/>
+          </p:cNvSpPr>
+          <p:nvPr>
+            <p:ph type="sldNum" sz="quarter" idx="5"/>
+          </p:nvPr>
+        </p:nvSpPr>
+        <p:spPr/>
+        <p:txBody>
+          <a:bodyPr/>
+          <a:lstStyle/>
+          <a:p>
+            <a:fld id="{D16833E0-5E66-4D1D-89F5-BD860FDD8F71}" type="slidenum">
+              <a:rPr lang="en-MY" smtClean="0"/>
+              <a:t>11</a:t>
+            </a:fld>
+            <a:endParaRPr lang="en-MY"/>
+          </a:p>
+        </p:txBody>
+      </p:sp>
+    </p:spTree>
+    <p:extLst>
+      <p:ext uri="{BB962C8B-B14F-4D97-AF65-F5344CB8AC3E}">
+        <p14:creationId xmlns:p14="http://schemas.microsoft.com/office/powerpoint/2010/main" val="127372749"/>
+      </p:ext>
+    </p:extLst>
+  </p:cSld>
+  <p:clrMapOvr>
+    <a:masterClrMapping/>
+  </p:clrMapOvr>
+</p:notes>
+</file>
+
 <file path=ppt/notesSlides/notesSlide2.xml><?xml version="1.0" encoding="utf-8"?>
 <p:notes xmlns:a="http://schemas.openxmlformats.org/drawingml/2006/main" xmlns:r="http://schemas.openxmlformats.org/officeDocument/2006/relationships" xmlns:p="http://schemas.openxmlformats.org/presentationml/2006/main">
   <p:cSld>
@@ -1299,7 +1408,7 @@
         <p:cNvPr id="1" name="">
           <a:extLst>
             <a:ext uri="{FF2B5EF4-FFF2-40B4-BE49-F238E27FC236}">
-              <a16:creationId xmlns:a16="http://schemas.microsoft.com/office/drawing/2014/main" id="{E96BB1E2-2CB1-5021-75E5-CF6CCD57DE06}"/>
+              <a16:creationId xmlns:a16="http://schemas.microsoft.com/office/drawing/2014/main" id="{8B26A8A5-B833-7343-7209-908FCBD75BE5}"/>
             </a:ext>
           </a:extLst>
         </p:cNvPr>
@@ -1319,7 +1428,7 @@
           <p:cNvPr id="2" name="Slide Image Placeholder 1">
             <a:extLst>
               <a:ext uri="{FF2B5EF4-FFF2-40B4-BE49-F238E27FC236}">
-                <a16:creationId xmlns:a16="http://schemas.microsoft.com/office/drawing/2014/main" id="{1B700753-6D9B-7CA5-2453-C8409535183B}"/>
+                <a16:creationId xmlns:a16="http://schemas.microsoft.com/office/drawing/2014/main" id="{42FF2406-0A14-1D35-AADE-48E362C8DDE1}"/>
               </a:ext>
             </a:extLst>
           </p:cNvPr>
@@ -1337,7 +1446,7 @@
           <p:cNvPr id="3" name="Notes Placeholder 2">
             <a:extLst>
               <a:ext uri="{FF2B5EF4-FFF2-40B4-BE49-F238E27FC236}">
-                <a16:creationId xmlns:a16="http://schemas.microsoft.com/office/drawing/2014/main" id="{40D44659-0B80-A575-79ED-8829A738DBDB}"/>
+                <a16:creationId xmlns:a16="http://schemas.microsoft.com/office/drawing/2014/main" id="{D0E63FA9-DD4D-5EC8-EE1A-889D4CEABE2D}"/>
               </a:ext>
             </a:extLst>
           </p:cNvPr>
@@ -1362,7 +1471,7 @@
           <p:cNvPr id="4" name="Slide Number Placeholder 3">
             <a:extLst>
               <a:ext uri="{FF2B5EF4-FFF2-40B4-BE49-F238E27FC236}">
-                <a16:creationId xmlns:a16="http://schemas.microsoft.com/office/drawing/2014/main" id="{C33108B5-6282-34C4-DE56-EADE451903FF}"/>
+                <a16:creationId xmlns:a16="http://schemas.microsoft.com/office/drawing/2014/main" id="{AE220576-8B22-42DB-81CB-9C739999567C}"/>
               </a:ext>
             </a:extLst>
           </p:cNvPr>
@@ -1389,7 +1498,7 @@
     </p:spTree>
     <p:extLst>
       <p:ext uri="{BB962C8B-B14F-4D97-AF65-F5344CB8AC3E}">
-        <p14:creationId xmlns:p14="http://schemas.microsoft.com/office/powerpoint/2010/main" val="127372749"/>
+        <p14:creationId xmlns:p14="http://schemas.microsoft.com/office/powerpoint/2010/main" val="1085205032"/>
       </p:ext>
     </p:extLst>
   </p:cSld>
@@ -1570,7 +1679,7 @@
           <a:p>
             <a:fld id="{1CD01395-AC05-405C-BAB9-E5D2B9FDBB40}" type="datetimeFigureOut">
               <a:rPr lang="en-MY" smtClean="0"/>
-              <a:t>22/6/2026</a:t>
+              <a:t>30/6/2026</a:t>
             </a:fld>
             <a:endParaRPr lang="en-MY"/>
           </a:p>
@@ -1885,7 +1994,7 @@
           <a:p>
             <a:fld id="{1CD01395-AC05-405C-BAB9-E5D2B9FDBB40}" type="datetimeFigureOut">
               <a:rPr lang="en-MY" smtClean="0"/>
-              <a:t>22/6/2026</a:t>
+              <a:t>30/6/2026</a:t>
             </a:fld>
             <a:endParaRPr lang="en-MY"/>
           </a:p>
@@ -2107,7 +2216,7 @@
           <a:p>
             <a:fld id="{1CD01395-AC05-405C-BAB9-E5D2B9FDBB40}" type="datetimeFigureOut">
               <a:rPr lang="en-MY" smtClean="0"/>
-              <a:t>22/6/2026</a:t>
+              <a:t>30/6/2026</a:t>
             </a:fld>
             <a:endParaRPr lang="en-MY"/>
           </a:p>
@@ -2398,7 +2507,7 @@
           <a:p>
             <a:fld id="{1CD01395-AC05-405C-BAB9-E5D2B9FDBB40}" type="datetimeFigureOut">
               <a:rPr lang="en-MY" smtClean="0"/>
-              <a:t>22/6/2026</a:t>
+              <a:t>30/6/2026</a:t>
             </a:fld>
             <a:endParaRPr lang="en-MY"/>
           </a:p>
@@ -2852,7 +2961,7 @@
           <a:p>
             <a:fld id="{1CD01395-AC05-405C-BAB9-E5D2B9FDBB40}" type="datetimeFigureOut">
               <a:rPr lang="en-MY" smtClean="0"/>
-              <a:t>22/6/2026</a:t>
+              <a:t>30/6/2026</a:t>
             </a:fld>
             <a:endParaRPr lang="en-MY"/>
           </a:p>
@@ -3428,7 +3537,7 @@
           <a:p>
             <a:fld id="{1CD01395-AC05-405C-BAB9-E5D2B9FDBB40}" type="datetimeFigureOut">
               <a:rPr lang="en-MY" smtClean="0"/>
-              <a:t>22/6/2026</a:t>
+              <a:t>30/6/2026</a:t>
             </a:fld>
             <a:endParaRPr lang="en-MY"/>
           </a:p>
@@ -4289,7 +4398,7 @@
           <a:p>
             <a:fld id="{1CD01395-AC05-405C-BAB9-E5D2B9FDBB40}" type="datetimeFigureOut">
               <a:rPr lang="en-MY" smtClean="0"/>
-              <a:t>22/6/2026</a:t>
+              <a:t>30/6/2026</a:t>
             </a:fld>
             <a:endParaRPr lang="en-MY"/>
           </a:p>
@@ -4494,7 +4603,7 @@
           <a:p>
             <a:fld id="{1CD01395-AC05-405C-BAB9-E5D2B9FDBB40}" type="datetimeFigureOut">
               <a:rPr lang="en-MY" smtClean="0"/>
-              <a:t>22/6/2026</a:t>
+              <a:t>30/6/2026</a:t>
             </a:fld>
             <a:endParaRPr lang="en-MY"/>
           </a:p>
@@ -4708,7 +4817,7 @@
           <a:p>
             <a:fld id="{1CD01395-AC05-405C-BAB9-E5D2B9FDBB40}" type="datetimeFigureOut">
               <a:rPr lang="en-MY" smtClean="0"/>
-              <a:t>22/6/2026</a:t>
+              <a:t>30/6/2026</a:t>
             </a:fld>
             <a:endParaRPr lang="en-MY"/>
           </a:p>
@@ -4913,7 +5022,7 @@
           <a:p>
             <a:fld id="{1CD01395-AC05-405C-BAB9-E5D2B9FDBB40}" type="datetimeFigureOut">
               <a:rPr lang="en-MY" smtClean="0"/>
-              <a:t>22/6/2026</a:t>
+              <a:t>30/6/2026</a:t>
             </a:fld>
             <a:endParaRPr lang="en-MY"/>
           </a:p>
@@ -5193,7 +5302,7 @@
           <a:p>
             <a:fld id="{1CD01395-AC05-405C-BAB9-E5D2B9FDBB40}" type="datetimeFigureOut">
               <a:rPr lang="en-MY" smtClean="0"/>
-              <a:t>22/6/2026</a:t>
+              <a:t>30/6/2026</a:t>
             </a:fld>
             <a:endParaRPr lang="en-MY"/>
           </a:p>
@@ -5460,7 +5569,7 @@
           <a:p>
             <a:fld id="{1CD01395-AC05-405C-BAB9-E5D2B9FDBB40}" type="datetimeFigureOut">
               <a:rPr lang="en-MY" smtClean="0"/>
-              <a:t>22/6/2026</a:t>
+              <a:t>30/6/2026</a:t>
             </a:fld>
             <a:endParaRPr lang="en-MY"/>
           </a:p>
@@ -5875,7 +5984,7 @@
           <a:p>
             <a:fld id="{1CD01395-AC05-405C-BAB9-E5D2B9FDBB40}" type="datetimeFigureOut">
               <a:rPr lang="en-MY" smtClean="0"/>
-              <a:t>22/6/2026</a:t>
+              <a:t>30/6/2026</a:t>
             </a:fld>
             <a:endParaRPr lang="en-MY"/>
           </a:p>
@@ -6023,7 +6132,7 @@
           <a:p>
             <a:fld id="{1CD01395-AC05-405C-BAB9-E5D2B9FDBB40}" type="datetimeFigureOut">
               <a:rPr lang="en-MY" smtClean="0"/>
-              <a:t>22/6/2026</a:t>
+              <a:t>30/6/2026</a:t>
             </a:fld>
             <a:endParaRPr lang="en-MY"/>
           </a:p>
@@ -6148,7 +6257,7 @@
           <a:p>
             <a:fld id="{1CD01395-AC05-405C-BAB9-E5D2B9FDBB40}" type="datetimeFigureOut">
               <a:rPr lang="en-MY" smtClean="0"/>
-              <a:t>22/6/2026</a:t>
+              <a:t>30/6/2026</a:t>
             </a:fld>
             <a:endParaRPr lang="en-MY"/>
           </a:p>
@@ -6427,7 +6536,7 @@
           <a:p>
             <a:fld id="{1CD01395-AC05-405C-BAB9-E5D2B9FDBB40}" type="datetimeFigureOut">
               <a:rPr lang="en-MY" smtClean="0"/>
-              <a:t>22/6/2026</a:t>
+              <a:t>30/6/2026</a:t>
             </a:fld>
             <a:endParaRPr lang="en-MY"/>
           </a:p>
@@ -6742,7 +6851,7 @@
           <a:p>
             <a:fld id="{1CD01395-AC05-405C-BAB9-E5D2B9FDBB40}" type="datetimeFigureOut">
               <a:rPr lang="en-MY" smtClean="0"/>
-              <a:t>22/6/2026</a:t>
+              <a:t>30/6/2026</a:t>
             </a:fld>
             <a:endParaRPr lang="en-MY"/>
           </a:p>
@@ -6995,7 +7104,7 @@
           <a:p>
             <a:fld id="{1CD01395-AC05-405C-BAB9-E5D2B9FDBB40}" type="datetimeFigureOut">
               <a:rPr lang="en-MY" smtClean="0"/>
-              <a:t>22/6/2026</a:t>
+              <a:t>30/6/2026</a:t>
             </a:fld>
             <a:endParaRPr lang="en-MY"/>
           </a:p>
@@ -7532,6 +7641,83 @@
         <p:cNvPr id="1" name="">
           <a:extLst>
             <a:ext uri="{FF2B5EF4-FFF2-40B4-BE49-F238E27FC236}">
+              <a16:creationId xmlns:a16="http://schemas.microsoft.com/office/drawing/2014/main" id="{A22B0890-8A74-DADB-7E71-29F6EA68BC9B}"/>
+            </a:ext>
+          </a:extLst>
+        </p:cNvPr>
+        <p:cNvGrpSpPr/>
+        <p:nvPr/>
+      </p:nvGrpSpPr>
+      <p:grpSpPr>
+        <a:xfrm>
+          <a:off x="0" y="0"/>
+          <a:ext cx="0" cy="0"/>
+          <a:chOff x="0" y="0"/>
+          <a:chExt cx="0" cy="0"/>
+        </a:xfrm>
+      </p:grpSpPr>
+      <p:pic>
+        <p:nvPicPr>
+          <p:cNvPr id="2" name="Picture 1">
+            <a:extLst>
+              <a:ext uri="{FF2B5EF4-FFF2-40B4-BE49-F238E27FC236}">
+                <a16:creationId xmlns:a16="http://schemas.microsoft.com/office/drawing/2014/main" id="{37D9A7D9-EE79-6F45-85FB-F8959616DDB4}"/>
+              </a:ext>
+              <a:ext uri="{C183D7F6-B498-43B3-948B-1728B52AA6E4}">
+                <adec:decorative xmlns:adec="http://schemas.microsoft.com/office/drawing/2017/decorative" val="1"/>
+              </a:ext>
+            </a:extLst>
+          </p:cNvPr>
+          <p:cNvPicPr>
+            <a:picLocks noChangeAspect="1"/>
+          </p:cNvPicPr>
+          <p:nvPr/>
+        </p:nvPicPr>
+        <p:blipFill>
+          <a:blip r:embed="rId3"/>
+          <a:stretch>
+            <a:fillRect/>
+          </a:stretch>
+        </p:blipFill>
+        <p:spPr>
+          <a:xfrm>
+            <a:off x="1423034" y="942526"/>
+            <a:ext cx="9634933" cy="4836481"/>
+          </a:xfrm>
+          <a:prstGeom prst="rect">
+            <a:avLst/>
+          </a:prstGeom>
+        </p:spPr>
+      </p:pic>
+    </p:spTree>
+    <p:extLst>
+      <p:ext uri="{BB962C8B-B14F-4D97-AF65-F5344CB8AC3E}">
+        <p14:creationId xmlns:p14="http://schemas.microsoft.com/office/powerpoint/2010/main" val="3630849691"/>
+      </p:ext>
+    </p:extLst>
+  </p:cSld>
+  <p:clrMapOvr>
+    <a:masterClrMapping/>
+  </p:clrMapOvr>
+</p:sld>
+</file>
+
+<file path=ppt/slides/slide11.xml><?xml version="1.0" encoding="utf-8"?>
+<p:sld xmlns:a="http://schemas.openxmlformats.org/drawingml/2006/main" xmlns:r="http://schemas.openxmlformats.org/officeDocument/2006/relationships" xmlns:p="http://schemas.openxmlformats.org/presentationml/2006/main" showMasterSp="0">
+  <p:cSld>
+    <p:bg>
+      <p:bgPr>
+        <a:solidFill>
+          <a:srgbClr val="CDF6F9"/>
+        </a:solidFill>
+        <a:effectLst/>
+      </p:bgPr>
+    </p:bg>
+    <p:spTree>
+      <p:nvGrpSpPr>
+        <p:cNvPr id="1" name="">
+          <a:extLst>
+            <a:ext uri="{FF2B5EF4-FFF2-40B4-BE49-F238E27FC236}">
               <a16:creationId xmlns:a16="http://schemas.microsoft.com/office/drawing/2014/main" id="{700F46A2-011D-3546-0B8A-E87BD8F1A4B0}"/>
             </a:ext>
           </a:extLst>
@@ -7639,7 +7825,7 @@
 </p:sld>
 </file>
 
-<file path=ppt/slides/slide11.xml><?xml version="1.0" encoding="utf-8"?>
+<file path=ppt/slides/slide12.xml><?xml version="1.0" encoding="utf-8"?>
 <p:sld xmlns:a="http://schemas.openxmlformats.org/drawingml/2006/main" xmlns:r="http://schemas.openxmlformats.org/officeDocument/2006/relationships" xmlns:p="http://schemas.openxmlformats.org/presentationml/2006/main">
   <p:cSld>
     <p:spTree>
